--- a/Proiect Sisteme Inteligente.pptx
+++ b/Proiect Sisteme Inteligente.pptx
@@ -9,27 +9,35 @@
     <p:sldId id="257" r:id="rId3"/>
     <p:sldId id="258" r:id="rId4"/>
     <p:sldId id="259" r:id="rId5"/>
-    <p:sldId id="260" r:id="rId6"/>
-    <p:sldId id="261" r:id="rId7"/>
-    <p:sldId id="262" r:id="rId8"/>
-    <p:sldId id="263" r:id="rId9"/>
+    <p:sldId id="261" r:id="rId6"/>
+    <p:sldId id="260" r:id="rId7"/>
+    <p:sldId id="265" r:id="rId8"/>
+    <p:sldId id="262" r:id="rId9"/>
+    <p:sldId id="263" r:id="rId10"/>
   </p:sldIdLst>
   <p:sldSz cx="18288000" cy="10287000"/>
   <p:notesSz cx="6858000" cy="9144000"/>
   <p:embeddedFontLst>
     <p:embeddedFont>
+      <p:font typeface="Abadi MT Condensed Light" panose="020B0306030101010103" pitchFamily="34" charset="77"/>
+      <p:regular r:id="rId11"/>
+    </p:embeddedFont>
+    <p:embeddedFont>
       <p:font typeface="Poppins" pitchFamily="2" charset="77"/>
-      <p:regular r:id="rId10"/>
+      <p:regular r:id="rId12"/>
+      <p:bold r:id="rId13"/>
+      <p:italic r:id="rId14"/>
+      <p:boldItalic r:id="rId15"/>
     </p:embeddedFont>
     <p:embeddedFont>
       <p:font typeface="Poppins Bold" pitchFamily="2" charset="77"/>
-      <p:regular r:id="rId11"/>
-      <p:bold r:id="rId12"/>
+      <p:regular r:id="rId16"/>
+      <p:bold r:id="rId17"/>
     </p:embeddedFont>
     <p:embeddedFont>
       <p:font typeface="Red Hat Display Bold" panose="02010803040201060303" pitchFamily="2" charset="77"/>
-      <p:regular r:id="rId13"/>
-      <p:bold r:id="rId14"/>
+      <p:regular r:id="rId18"/>
+      <p:bold r:id="rId19"/>
     </p:embeddedFont>
   </p:embeddedFontLst>
   <p:defaultTextStyle>
@@ -326,7 +334,7 @@
             <a:fld id="{1D8BD707-D9CF-40AE-B4C6-C98DA3205C09}" type="datetimeFigureOut">
               <a:rPr lang="en-US" smtClean="0"/>
               <a:pPr/>
-              <a:t>5/20/26</a:t>
+              <a:t>5/27/26</a:t>
             </a:fld>
             <a:endParaRPr lang="en-US"/>
           </a:p>
@@ -491,7 +499,7 @@
             <a:fld id="{1D8BD707-D9CF-40AE-B4C6-C98DA3205C09}" type="datetimeFigureOut">
               <a:rPr lang="en-US" smtClean="0"/>
               <a:pPr/>
-              <a:t>5/20/26</a:t>
+              <a:t>5/27/26</a:t>
             </a:fld>
             <a:endParaRPr lang="en-US"/>
           </a:p>
@@ -666,7 +674,7 @@
             <a:fld id="{1D8BD707-D9CF-40AE-B4C6-C98DA3205C09}" type="datetimeFigureOut">
               <a:rPr lang="en-US" smtClean="0"/>
               <a:pPr/>
-              <a:t>5/20/26</a:t>
+              <a:t>5/27/26</a:t>
             </a:fld>
             <a:endParaRPr lang="en-US"/>
           </a:p>
@@ -831,7 +839,7 @@
             <a:fld id="{1D8BD707-D9CF-40AE-B4C6-C98DA3205C09}" type="datetimeFigureOut">
               <a:rPr lang="en-US" smtClean="0"/>
               <a:pPr/>
-              <a:t>5/20/26</a:t>
+              <a:t>5/27/26</a:t>
             </a:fld>
             <a:endParaRPr lang="en-US"/>
           </a:p>
@@ -1073,7 +1081,7 @@
             <a:fld id="{1D8BD707-D9CF-40AE-B4C6-C98DA3205C09}" type="datetimeFigureOut">
               <a:rPr lang="en-US" smtClean="0"/>
               <a:pPr/>
-              <a:t>5/20/26</a:t>
+              <a:t>5/27/26</a:t>
             </a:fld>
             <a:endParaRPr lang="en-US"/>
           </a:p>
@@ -1355,7 +1363,7 @@
             <a:fld id="{1D8BD707-D9CF-40AE-B4C6-C98DA3205C09}" type="datetimeFigureOut">
               <a:rPr lang="en-US" smtClean="0"/>
               <a:pPr/>
-              <a:t>5/20/26</a:t>
+              <a:t>5/27/26</a:t>
             </a:fld>
             <a:endParaRPr lang="en-US"/>
           </a:p>
@@ -1771,7 +1779,7 @@
             <a:fld id="{1D8BD707-D9CF-40AE-B4C6-C98DA3205C09}" type="datetimeFigureOut">
               <a:rPr lang="en-US" smtClean="0"/>
               <a:pPr/>
-              <a:t>5/20/26</a:t>
+              <a:t>5/27/26</a:t>
             </a:fld>
             <a:endParaRPr lang="en-US"/>
           </a:p>
@@ -1885,7 +1893,7 @@
             <a:fld id="{1D8BD707-D9CF-40AE-B4C6-C98DA3205C09}" type="datetimeFigureOut">
               <a:rPr lang="en-US" smtClean="0"/>
               <a:pPr/>
-              <a:t>5/20/26</a:t>
+              <a:t>5/27/26</a:t>
             </a:fld>
             <a:endParaRPr lang="en-US"/>
           </a:p>
@@ -1977,7 +1985,7 @@
             <a:fld id="{1D8BD707-D9CF-40AE-B4C6-C98DA3205C09}" type="datetimeFigureOut">
               <a:rPr lang="en-US" smtClean="0"/>
               <a:pPr/>
-              <a:t>5/20/26</a:t>
+              <a:t>5/27/26</a:t>
             </a:fld>
             <a:endParaRPr lang="en-US"/>
           </a:p>
@@ -2249,7 +2257,7 @@
             <a:fld id="{1D8BD707-D9CF-40AE-B4C6-C98DA3205C09}" type="datetimeFigureOut">
               <a:rPr lang="en-US" smtClean="0"/>
               <a:pPr/>
-              <a:t>5/20/26</a:t>
+              <a:t>5/27/26</a:t>
             </a:fld>
             <a:endParaRPr lang="en-US"/>
           </a:p>
@@ -2498,7 +2506,7 @@
             <a:fld id="{1D8BD707-D9CF-40AE-B4C6-C98DA3205C09}" type="datetimeFigureOut">
               <a:rPr lang="en-US" smtClean="0"/>
               <a:pPr/>
-              <a:t>5/20/26</a:t>
+              <a:t>5/27/26</a:t>
             </a:fld>
             <a:endParaRPr lang="en-US"/>
           </a:p>
@@ -2706,7 +2714,7 @@
             <a:fld id="{1D8BD707-D9CF-40AE-B4C6-C98DA3205C09}" type="datetimeFigureOut">
               <a:rPr lang="en-US" smtClean="0"/>
               <a:pPr/>
-              <a:t>5/20/26</a:t>
+              <a:t>5/27/26</a:t>
             </a:fld>
             <a:endParaRPr lang="en-US"/>
           </a:p>
@@ -3169,10 +3177,10 @@
             </a:pathLst>
           </a:custGeom>
           <a:blipFill>
-            <a:blip r:embed="rId3">
+            <a:blip>
               <a:extLst>
                 <a:ext uri="{96DAC541-7B7A-43D3-8B79-37D633B846F1}">
-                  <asvg:svgBlip xmlns:asvg="http://schemas.microsoft.com/office/drawing/2016/SVG/main" r:embed="rId4"/>
+                  <asvg:svgBlip xmlns:asvg="http://schemas.microsoft.com/office/drawing/2016/SVG/main" r:embed="rId3"/>
                 </a:ext>
               </a:extLst>
             </a:blip>
@@ -3228,10 +3236,10 @@
             </a:pathLst>
           </a:custGeom>
           <a:blipFill>
-            <a:blip r:embed="rId5">
+            <a:blip>
               <a:extLst>
                 <a:ext uri="{96DAC541-7B7A-43D3-8B79-37D633B846F1}">
-                  <asvg:svgBlip xmlns:asvg="http://schemas.microsoft.com/office/drawing/2016/SVG/main" r:embed="rId6"/>
+                  <asvg:svgBlip xmlns:asvg="http://schemas.microsoft.com/office/drawing/2016/SVG/main" r:embed="rId4"/>
                 </a:ext>
               </a:extLst>
             </a:blip>
@@ -3480,10 +3488,10 @@
             </a:pathLst>
           </a:custGeom>
           <a:blipFill>
-            <a:blip r:embed="rId5">
+            <a:blip>
               <a:extLst>
                 <a:ext uri="{96DAC541-7B7A-43D3-8B79-37D633B846F1}">
-                  <asvg:svgBlip xmlns:asvg="http://schemas.microsoft.com/office/drawing/2016/SVG/main" r:embed="rId6"/>
+                  <asvg:svgBlip xmlns:asvg="http://schemas.microsoft.com/office/drawing/2016/SVG/main" r:embed="rId4"/>
                 </a:ext>
               </a:extLst>
             </a:blip>
@@ -3616,10 +3624,10 @@
             </a:pathLst>
           </a:custGeom>
           <a:blipFill>
-            <a:blip r:embed="rId2">
+            <a:blip>
               <a:extLst>
                 <a:ext uri="{96DAC541-7B7A-43D3-8B79-37D633B846F1}">
-                  <asvg:svgBlip xmlns:asvg="http://schemas.microsoft.com/office/drawing/2016/SVG/main" r:embed="rId3"/>
+                  <asvg:svgBlip xmlns:asvg="http://schemas.microsoft.com/office/drawing/2016/SVG/main" r:embed="rId2"/>
                 </a:ext>
               </a:extLst>
             </a:blip>
@@ -3675,7 +3683,7 @@
             </a:pathLst>
           </a:custGeom>
           <a:blipFill>
-            <a:blip r:embed="rId4"/>
+            <a:blip r:embed="rId3"/>
             <a:stretch>
               <a:fillRect/>
             </a:stretch>
@@ -3987,7 +3995,7 @@
               </a:pathLst>
             </a:custGeom>
             <a:blipFill>
-              <a:blip r:embed="rId5"/>
+              <a:blip r:embed="rId4"/>
               <a:stretch>
                 <a:fillRect t="-577" b="-577"/>
               </a:stretch>
@@ -4168,7 +4176,7 @@
           <p:nvPr/>
         </p:nvPicPr>
         <p:blipFill>
-          <a:blip r:embed="rId6">
+          <a:blip r:embed="rId5">
             <a:extLst>
               <a:ext uri="{28A0092B-C50C-407E-A947-70E740481C1C}">
                 <a14:useLocalDpi xmlns:a14="http://schemas.microsoft.com/office/drawing/2010/main" val="0"/>
@@ -4314,10 +4322,10 @@
             </a:pathLst>
           </a:custGeom>
           <a:blipFill>
-            <a:blip r:embed="rId3">
+            <a:blip>
               <a:extLst>
                 <a:ext uri="{96DAC541-7B7A-43D3-8B79-37D633B846F1}">
-                  <asvg:svgBlip xmlns:asvg="http://schemas.microsoft.com/office/drawing/2016/SVG/main" r:embed="rId4"/>
+                  <asvg:svgBlip xmlns:asvg="http://schemas.microsoft.com/office/drawing/2016/SVG/main" r:embed="rId3"/>
                 </a:ext>
               </a:extLst>
             </a:blip>
@@ -4384,7 +4392,7 @@
               </a:pathLst>
             </a:custGeom>
             <a:blipFill>
-              <a:blip r:embed="rId5"/>
+              <a:blip r:embed="rId4"/>
               <a:stretch>
                 <a:fillRect l="-34" r="-34"/>
               </a:stretch>
@@ -5478,7 +5486,7 @@
               </a:spcBef>
             </a:pPr>
             <a:r>
-              <a:rPr lang="en-US" sz="3635" b="1">
+              <a:rPr lang="en-US" sz="3635" b="1" dirty="0" err="1">
                 <a:solidFill>
                   <a:srgbClr val="FFFFFF"/>
                 </a:solidFill>
@@ -5487,8 +5495,65 @@
                 <a:cs typeface="Red Hat Display Bold"/>
                 <a:sym typeface="Red Hat Display Bold"/>
               </a:rPr>
-              <a:t>Setul de Date și Caracteristici</a:t>
-            </a:r>
+              <a:t>Setul</a:t>
+            </a:r>
+            <a:r>
+              <a:rPr lang="en-US" sz="3635" b="1" dirty="0">
+                <a:solidFill>
+                  <a:srgbClr val="FFFFFF"/>
+                </a:solidFill>
+                <a:latin typeface="Red Hat Display Bold"/>
+                <a:ea typeface="Red Hat Display Bold"/>
+                <a:cs typeface="Red Hat Display Bold"/>
+                <a:sym typeface="Red Hat Display Bold"/>
+              </a:rPr>
+              <a:t> de Date </a:t>
+            </a:r>
+            <a:r>
+              <a:rPr lang="en-US" sz="3635" b="1" dirty="0" err="1">
+                <a:solidFill>
+                  <a:srgbClr val="FFFFFF"/>
+                </a:solidFill>
+                <a:latin typeface="Red Hat Display Bold"/>
+                <a:ea typeface="Red Hat Display Bold"/>
+                <a:cs typeface="Red Hat Display Bold"/>
+                <a:sym typeface="Red Hat Display Bold"/>
+              </a:rPr>
+              <a:t>și</a:t>
+            </a:r>
+            <a:r>
+              <a:rPr lang="en-US" sz="3635" b="1" dirty="0">
+                <a:solidFill>
+                  <a:srgbClr val="FFFFFF"/>
+                </a:solidFill>
+                <a:latin typeface="Red Hat Display Bold"/>
+                <a:ea typeface="Red Hat Display Bold"/>
+                <a:cs typeface="Red Hat Display Bold"/>
+                <a:sym typeface="Red Hat Display Bold"/>
+              </a:rPr>
+              <a:t> </a:t>
+            </a:r>
+            <a:r>
+              <a:rPr lang="en-US" sz="3635" b="1" dirty="0" err="1">
+                <a:solidFill>
+                  <a:srgbClr val="FFFFFF"/>
+                </a:solidFill>
+                <a:latin typeface="Red Hat Display Bold"/>
+                <a:ea typeface="Red Hat Display Bold"/>
+                <a:cs typeface="Red Hat Display Bold"/>
+                <a:sym typeface="Red Hat Display Bold"/>
+              </a:rPr>
+              <a:t>Caracteristici</a:t>
+            </a:r>
+            <a:endParaRPr lang="en-US" sz="3635" b="1" dirty="0">
+              <a:solidFill>
+                <a:srgbClr val="FFFFFF"/>
+              </a:solidFill>
+              <a:latin typeface="Red Hat Display Bold"/>
+              <a:ea typeface="Red Hat Display Bold"/>
+              <a:cs typeface="Red Hat Display Bold"/>
+              <a:sym typeface="Red Hat Display Bold"/>
+            </a:endParaRPr>
           </a:p>
         </p:txBody>
       </p:sp>
@@ -5501,6 +5566,1966 @@
 </file>
 
 <file path=ppt/slides/slide5.xml><?xml version="1.0" encoding="utf-8"?>
+<p:sld xmlns:a="http://schemas.openxmlformats.org/drawingml/2006/main" xmlns:r="http://schemas.openxmlformats.org/officeDocument/2006/relationships" xmlns:p="http://schemas.openxmlformats.org/presentationml/2006/main">
+  <p:cSld>
+    <p:bg>
+      <p:bgPr>
+        <a:solidFill>
+          <a:srgbClr val="1B2C43"/>
+        </a:solidFill>
+        <a:effectLst/>
+      </p:bgPr>
+    </p:bg>
+    <p:spTree>
+      <p:nvGrpSpPr>
+        <p:cNvPr id="1" name=""/>
+        <p:cNvGrpSpPr/>
+        <p:nvPr/>
+      </p:nvGrpSpPr>
+      <p:grpSpPr>
+        <a:xfrm>
+          <a:off x="0" y="0"/>
+          <a:ext cx="0" cy="0"/>
+          <a:chOff x="0" y="0"/>
+          <a:chExt cx="0" cy="0"/>
+        </a:xfrm>
+      </p:grpSpPr>
+      <p:sp>
+        <p:nvSpPr>
+          <p:cNvPr id="2" name="Freeform 2"/>
+          <p:cNvSpPr/>
+          <p:nvPr/>
+        </p:nvSpPr>
+        <p:spPr>
+          <a:xfrm>
+            <a:off x="15223639" y="1028700"/>
+            <a:ext cx="503963" cy="589744"/>
+          </a:xfrm>
+          <a:custGeom>
+            <a:avLst/>
+            <a:gdLst/>
+            <a:ahLst/>
+            <a:cxnLst/>
+            <a:rect l="l" t="t" r="r" b="b"/>
+            <a:pathLst>
+              <a:path w="503963" h="589744">
+                <a:moveTo>
+                  <a:pt x="0" y="0"/>
+                </a:moveTo>
+                <a:lnTo>
+                  <a:pt x="503963" y="0"/>
+                </a:lnTo>
+                <a:lnTo>
+                  <a:pt x="503963" y="589744"/>
+                </a:lnTo>
+                <a:lnTo>
+                  <a:pt x="0" y="589744"/>
+                </a:lnTo>
+                <a:lnTo>
+                  <a:pt x="0" y="0"/>
+                </a:lnTo>
+                <a:close/>
+              </a:path>
+            </a:pathLst>
+          </a:custGeom>
+          <a:blipFill>
+            <a:blip>
+              <a:extLst>
+                <a:ext uri="{96DAC541-7B7A-43D3-8B79-37D633B846F1}">
+                  <asvg:svgBlip xmlns:asvg="http://schemas.microsoft.com/office/drawing/2016/SVG/main" r:embed="rId2"/>
+                </a:ext>
+              </a:extLst>
+            </a:blip>
+            <a:stretch>
+              <a:fillRect/>
+            </a:stretch>
+          </a:blipFill>
+        </p:spPr>
+        <p:txBody>
+          <a:bodyPr/>
+          <a:lstStyle/>
+          <a:p>
+            <a:endParaRPr lang="en-RO"/>
+          </a:p>
+        </p:txBody>
+      </p:sp>
+      <p:grpSp>
+        <p:nvGrpSpPr>
+          <p:cNvPr id="3" name="Group 3"/>
+          <p:cNvGrpSpPr/>
+          <p:nvPr/>
+        </p:nvGrpSpPr>
+        <p:grpSpPr>
+          <a:xfrm>
+            <a:off x="1028700" y="1605495"/>
+            <a:ext cx="696307" cy="683413"/>
+            <a:chOff x="0" y="0"/>
+            <a:chExt cx="685800" cy="673100"/>
+          </a:xfrm>
+        </p:grpSpPr>
+        <p:sp>
+          <p:nvSpPr>
+            <p:cNvPr id="4" name="Freeform 4"/>
+            <p:cNvSpPr/>
+            <p:nvPr/>
+          </p:nvSpPr>
+          <p:spPr>
+            <a:xfrm>
+              <a:off x="0" y="0"/>
+              <a:ext cx="685800" cy="679450"/>
+            </a:xfrm>
+            <a:custGeom>
+              <a:avLst/>
+              <a:gdLst/>
+              <a:ahLst/>
+              <a:cxnLst/>
+              <a:rect l="l" t="t" r="r" b="b"/>
+              <a:pathLst>
+                <a:path w="685800" h="679450">
+                  <a:moveTo>
+                    <a:pt x="342900" y="0"/>
+                  </a:moveTo>
+                  <a:lnTo>
+                    <a:pt x="382270" y="210820"/>
+                  </a:lnTo>
+                  <a:lnTo>
+                    <a:pt x="529590" y="54610"/>
+                  </a:lnTo>
+                  <a:lnTo>
+                    <a:pt x="449580" y="254000"/>
+                  </a:lnTo>
+                  <a:lnTo>
+                    <a:pt x="657860" y="201930"/>
+                  </a:lnTo>
+                  <a:lnTo>
+                    <a:pt x="482600" y="326390"/>
+                  </a:lnTo>
+                  <a:lnTo>
+                    <a:pt x="685800" y="396240"/>
+                  </a:lnTo>
+                  <a:lnTo>
+                    <a:pt x="471170" y="405130"/>
+                  </a:lnTo>
+                  <a:lnTo>
+                    <a:pt x="604520" y="572770"/>
+                  </a:lnTo>
+                  <a:lnTo>
+                    <a:pt x="419100" y="464820"/>
+                  </a:lnTo>
+                  <a:lnTo>
+                    <a:pt x="440690" y="679450"/>
+                  </a:lnTo>
+                  <a:lnTo>
+                    <a:pt x="342900" y="487680"/>
+                  </a:lnTo>
+                  <a:lnTo>
+                    <a:pt x="245110" y="679450"/>
+                  </a:lnTo>
+                  <a:lnTo>
+                    <a:pt x="266700" y="464820"/>
+                  </a:lnTo>
+                  <a:lnTo>
+                    <a:pt x="81280" y="572770"/>
+                  </a:lnTo>
+                  <a:lnTo>
+                    <a:pt x="214630" y="405130"/>
+                  </a:lnTo>
+                  <a:lnTo>
+                    <a:pt x="0" y="396240"/>
+                  </a:lnTo>
+                  <a:lnTo>
+                    <a:pt x="203200" y="326390"/>
+                  </a:lnTo>
+                  <a:lnTo>
+                    <a:pt x="27940" y="201930"/>
+                  </a:lnTo>
+                  <a:lnTo>
+                    <a:pt x="236220" y="254000"/>
+                  </a:lnTo>
+                  <a:lnTo>
+                    <a:pt x="156210" y="54610"/>
+                  </a:lnTo>
+                  <a:lnTo>
+                    <a:pt x="303530" y="210820"/>
+                  </a:lnTo>
+                  <a:close/>
+                </a:path>
+              </a:pathLst>
+            </a:custGeom>
+            <a:solidFill>
+              <a:srgbClr val="FFDE59"/>
+            </a:solidFill>
+          </p:spPr>
+          <p:txBody>
+            <a:bodyPr/>
+            <a:lstStyle/>
+            <a:p>
+              <a:endParaRPr lang="en-RO"/>
+            </a:p>
+          </p:txBody>
+        </p:sp>
+        <p:sp>
+          <p:nvSpPr>
+            <p:cNvPr id="5" name="TextBox 5"/>
+            <p:cNvSpPr txBox="1"/>
+            <p:nvPr/>
+          </p:nvSpPr>
+          <p:spPr>
+            <a:xfrm>
+              <a:off x="203200" y="136525"/>
+              <a:ext cx="279400" cy="346075"/>
+            </a:xfrm>
+            <a:prstGeom prst="rect">
+              <a:avLst/>
+            </a:prstGeom>
+          </p:spPr>
+          <p:txBody>
+            <a:bodyPr lIns="50800" tIns="50800" rIns="50800" bIns="50800" rtlCol="0" anchor="ctr"/>
+            <a:lstStyle/>
+            <a:p>
+              <a:pPr marL="0" lvl="0" indent="0" algn="ctr">
+                <a:lnSpc>
+                  <a:spcPts val="3499"/>
+                </a:lnSpc>
+              </a:pPr>
+              <a:endParaRPr/>
+            </a:p>
+          </p:txBody>
+        </p:sp>
+      </p:grpSp>
+      <p:grpSp>
+        <p:nvGrpSpPr>
+          <p:cNvPr id="6" name="Group 6"/>
+          <p:cNvGrpSpPr/>
+          <p:nvPr/>
+        </p:nvGrpSpPr>
+        <p:grpSpPr>
+          <a:xfrm>
+            <a:off x="985827" y="3159116"/>
+            <a:ext cx="696307" cy="683413"/>
+            <a:chOff x="0" y="0"/>
+            <a:chExt cx="685800" cy="673100"/>
+          </a:xfrm>
+        </p:grpSpPr>
+        <p:sp>
+          <p:nvSpPr>
+            <p:cNvPr id="7" name="Freeform 7"/>
+            <p:cNvSpPr/>
+            <p:nvPr/>
+          </p:nvSpPr>
+          <p:spPr>
+            <a:xfrm>
+              <a:off x="0" y="0"/>
+              <a:ext cx="685800" cy="679450"/>
+            </a:xfrm>
+            <a:custGeom>
+              <a:avLst/>
+              <a:gdLst/>
+              <a:ahLst/>
+              <a:cxnLst/>
+              <a:rect l="l" t="t" r="r" b="b"/>
+              <a:pathLst>
+                <a:path w="685800" h="679450">
+                  <a:moveTo>
+                    <a:pt x="342900" y="0"/>
+                  </a:moveTo>
+                  <a:lnTo>
+                    <a:pt x="382270" y="210820"/>
+                  </a:lnTo>
+                  <a:lnTo>
+                    <a:pt x="529590" y="54610"/>
+                  </a:lnTo>
+                  <a:lnTo>
+                    <a:pt x="449580" y="254000"/>
+                  </a:lnTo>
+                  <a:lnTo>
+                    <a:pt x="657860" y="201930"/>
+                  </a:lnTo>
+                  <a:lnTo>
+                    <a:pt x="482600" y="326390"/>
+                  </a:lnTo>
+                  <a:lnTo>
+                    <a:pt x="685800" y="396240"/>
+                  </a:lnTo>
+                  <a:lnTo>
+                    <a:pt x="471170" y="405130"/>
+                  </a:lnTo>
+                  <a:lnTo>
+                    <a:pt x="604520" y="572770"/>
+                  </a:lnTo>
+                  <a:lnTo>
+                    <a:pt x="419100" y="464820"/>
+                  </a:lnTo>
+                  <a:lnTo>
+                    <a:pt x="440690" y="679450"/>
+                  </a:lnTo>
+                  <a:lnTo>
+                    <a:pt x="342900" y="487680"/>
+                  </a:lnTo>
+                  <a:lnTo>
+                    <a:pt x="245110" y="679450"/>
+                  </a:lnTo>
+                  <a:lnTo>
+                    <a:pt x="266700" y="464820"/>
+                  </a:lnTo>
+                  <a:lnTo>
+                    <a:pt x="81280" y="572770"/>
+                  </a:lnTo>
+                  <a:lnTo>
+                    <a:pt x="214630" y="405130"/>
+                  </a:lnTo>
+                  <a:lnTo>
+                    <a:pt x="0" y="396240"/>
+                  </a:lnTo>
+                  <a:lnTo>
+                    <a:pt x="203200" y="326390"/>
+                  </a:lnTo>
+                  <a:lnTo>
+                    <a:pt x="27940" y="201930"/>
+                  </a:lnTo>
+                  <a:lnTo>
+                    <a:pt x="236220" y="254000"/>
+                  </a:lnTo>
+                  <a:lnTo>
+                    <a:pt x="156210" y="54610"/>
+                  </a:lnTo>
+                  <a:lnTo>
+                    <a:pt x="303530" y="210820"/>
+                  </a:lnTo>
+                  <a:close/>
+                </a:path>
+              </a:pathLst>
+            </a:custGeom>
+            <a:solidFill>
+              <a:srgbClr val="FFDE59"/>
+            </a:solidFill>
+          </p:spPr>
+          <p:txBody>
+            <a:bodyPr/>
+            <a:lstStyle/>
+            <a:p>
+              <a:endParaRPr lang="en-RO"/>
+            </a:p>
+          </p:txBody>
+        </p:sp>
+        <p:sp>
+          <p:nvSpPr>
+            <p:cNvPr id="8" name="TextBox 8"/>
+            <p:cNvSpPr txBox="1"/>
+            <p:nvPr/>
+          </p:nvSpPr>
+          <p:spPr>
+            <a:xfrm>
+              <a:off x="203200" y="136525"/>
+              <a:ext cx="279400" cy="346075"/>
+            </a:xfrm>
+            <a:prstGeom prst="rect">
+              <a:avLst/>
+            </a:prstGeom>
+          </p:spPr>
+          <p:txBody>
+            <a:bodyPr lIns="50800" tIns="50800" rIns="50800" bIns="50800" rtlCol="0" anchor="ctr"/>
+            <a:lstStyle/>
+            <a:p>
+              <a:pPr marL="0" lvl="0" indent="0" algn="ctr">
+                <a:lnSpc>
+                  <a:spcPts val="3499"/>
+                </a:lnSpc>
+              </a:pPr>
+              <a:endParaRPr/>
+            </a:p>
+          </p:txBody>
+        </p:sp>
+      </p:grpSp>
+      <p:grpSp>
+        <p:nvGrpSpPr>
+          <p:cNvPr id="9" name="Group 9"/>
+          <p:cNvGrpSpPr/>
+          <p:nvPr/>
+        </p:nvGrpSpPr>
+        <p:grpSpPr>
+          <a:xfrm>
+            <a:off x="876196" y="4975515"/>
+            <a:ext cx="696307" cy="683413"/>
+            <a:chOff x="0" y="0"/>
+            <a:chExt cx="685800" cy="673100"/>
+          </a:xfrm>
+        </p:grpSpPr>
+        <p:sp>
+          <p:nvSpPr>
+            <p:cNvPr id="10" name="Freeform 10"/>
+            <p:cNvSpPr/>
+            <p:nvPr/>
+          </p:nvSpPr>
+          <p:spPr>
+            <a:xfrm>
+              <a:off x="0" y="0"/>
+              <a:ext cx="685800" cy="679450"/>
+            </a:xfrm>
+            <a:custGeom>
+              <a:avLst/>
+              <a:gdLst/>
+              <a:ahLst/>
+              <a:cxnLst/>
+              <a:rect l="l" t="t" r="r" b="b"/>
+              <a:pathLst>
+                <a:path w="685800" h="679450">
+                  <a:moveTo>
+                    <a:pt x="342900" y="0"/>
+                  </a:moveTo>
+                  <a:lnTo>
+                    <a:pt x="382270" y="210820"/>
+                  </a:lnTo>
+                  <a:lnTo>
+                    <a:pt x="529590" y="54610"/>
+                  </a:lnTo>
+                  <a:lnTo>
+                    <a:pt x="449580" y="254000"/>
+                  </a:lnTo>
+                  <a:lnTo>
+                    <a:pt x="657860" y="201930"/>
+                  </a:lnTo>
+                  <a:lnTo>
+                    <a:pt x="482600" y="326390"/>
+                  </a:lnTo>
+                  <a:lnTo>
+                    <a:pt x="685800" y="396240"/>
+                  </a:lnTo>
+                  <a:lnTo>
+                    <a:pt x="471170" y="405130"/>
+                  </a:lnTo>
+                  <a:lnTo>
+                    <a:pt x="604520" y="572770"/>
+                  </a:lnTo>
+                  <a:lnTo>
+                    <a:pt x="419100" y="464820"/>
+                  </a:lnTo>
+                  <a:lnTo>
+                    <a:pt x="440690" y="679450"/>
+                  </a:lnTo>
+                  <a:lnTo>
+                    <a:pt x="342900" y="487680"/>
+                  </a:lnTo>
+                  <a:lnTo>
+                    <a:pt x="245110" y="679450"/>
+                  </a:lnTo>
+                  <a:lnTo>
+                    <a:pt x="266700" y="464820"/>
+                  </a:lnTo>
+                  <a:lnTo>
+                    <a:pt x="81280" y="572770"/>
+                  </a:lnTo>
+                  <a:lnTo>
+                    <a:pt x="214630" y="405130"/>
+                  </a:lnTo>
+                  <a:lnTo>
+                    <a:pt x="0" y="396240"/>
+                  </a:lnTo>
+                  <a:lnTo>
+                    <a:pt x="203200" y="326390"/>
+                  </a:lnTo>
+                  <a:lnTo>
+                    <a:pt x="27940" y="201930"/>
+                  </a:lnTo>
+                  <a:lnTo>
+                    <a:pt x="236220" y="254000"/>
+                  </a:lnTo>
+                  <a:lnTo>
+                    <a:pt x="156210" y="54610"/>
+                  </a:lnTo>
+                  <a:lnTo>
+                    <a:pt x="303530" y="210820"/>
+                  </a:lnTo>
+                  <a:close/>
+                </a:path>
+              </a:pathLst>
+            </a:custGeom>
+            <a:solidFill>
+              <a:srgbClr val="FFDE59"/>
+            </a:solidFill>
+          </p:spPr>
+          <p:txBody>
+            <a:bodyPr/>
+            <a:lstStyle/>
+            <a:p>
+              <a:endParaRPr lang="en-RO"/>
+            </a:p>
+          </p:txBody>
+        </p:sp>
+        <p:sp>
+          <p:nvSpPr>
+            <p:cNvPr id="11" name="TextBox 11"/>
+            <p:cNvSpPr txBox="1"/>
+            <p:nvPr/>
+          </p:nvSpPr>
+          <p:spPr>
+            <a:xfrm>
+              <a:off x="203200" y="136525"/>
+              <a:ext cx="279400" cy="346075"/>
+            </a:xfrm>
+            <a:prstGeom prst="rect">
+              <a:avLst/>
+            </a:prstGeom>
+          </p:spPr>
+          <p:txBody>
+            <a:bodyPr lIns="50800" tIns="50800" rIns="50800" bIns="50800" rtlCol="0" anchor="ctr"/>
+            <a:lstStyle/>
+            <a:p>
+              <a:pPr marL="0" lvl="0" indent="0" algn="ctr">
+                <a:lnSpc>
+                  <a:spcPts val="3499"/>
+                </a:lnSpc>
+              </a:pPr>
+              <a:endParaRPr/>
+            </a:p>
+          </p:txBody>
+        </p:sp>
+      </p:grpSp>
+      <p:grpSp>
+        <p:nvGrpSpPr>
+          <p:cNvPr id="14" name="Group 14"/>
+          <p:cNvGrpSpPr/>
+          <p:nvPr/>
+        </p:nvGrpSpPr>
+        <p:grpSpPr>
+          <a:xfrm>
+            <a:off x="8736507" y="-1641561"/>
+            <a:ext cx="3449554" cy="3385673"/>
+            <a:chOff x="0" y="0"/>
+            <a:chExt cx="685800" cy="673100"/>
+          </a:xfrm>
+        </p:grpSpPr>
+        <p:sp>
+          <p:nvSpPr>
+            <p:cNvPr id="15" name="Freeform 15"/>
+            <p:cNvSpPr/>
+            <p:nvPr/>
+          </p:nvSpPr>
+          <p:spPr>
+            <a:xfrm>
+              <a:off x="0" y="0"/>
+              <a:ext cx="685800" cy="679450"/>
+            </a:xfrm>
+            <a:custGeom>
+              <a:avLst/>
+              <a:gdLst/>
+              <a:ahLst/>
+              <a:cxnLst/>
+              <a:rect l="l" t="t" r="r" b="b"/>
+              <a:pathLst>
+                <a:path w="685800" h="679450">
+                  <a:moveTo>
+                    <a:pt x="342900" y="0"/>
+                  </a:moveTo>
+                  <a:lnTo>
+                    <a:pt x="382270" y="210820"/>
+                  </a:lnTo>
+                  <a:lnTo>
+                    <a:pt x="529590" y="54610"/>
+                  </a:lnTo>
+                  <a:lnTo>
+                    <a:pt x="449580" y="254000"/>
+                  </a:lnTo>
+                  <a:lnTo>
+                    <a:pt x="657860" y="201930"/>
+                  </a:lnTo>
+                  <a:lnTo>
+                    <a:pt x="482600" y="326390"/>
+                  </a:lnTo>
+                  <a:lnTo>
+                    <a:pt x="685800" y="396240"/>
+                  </a:lnTo>
+                  <a:lnTo>
+                    <a:pt x="471170" y="405130"/>
+                  </a:lnTo>
+                  <a:lnTo>
+                    <a:pt x="604520" y="572770"/>
+                  </a:lnTo>
+                  <a:lnTo>
+                    <a:pt x="419100" y="464820"/>
+                  </a:lnTo>
+                  <a:lnTo>
+                    <a:pt x="440690" y="679450"/>
+                  </a:lnTo>
+                  <a:lnTo>
+                    <a:pt x="342900" y="487680"/>
+                  </a:lnTo>
+                  <a:lnTo>
+                    <a:pt x="245110" y="679450"/>
+                  </a:lnTo>
+                  <a:lnTo>
+                    <a:pt x="266700" y="464820"/>
+                  </a:lnTo>
+                  <a:lnTo>
+                    <a:pt x="81280" y="572770"/>
+                  </a:lnTo>
+                  <a:lnTo>
+                    <a:pt x="214630" y="405130"/>
+                  </a:lnTo>
+                  <a:lnTo>
+                    <a:pt x="0" y="396240"/>
+                  </a:lnTo>
+                  <a:lnTo>
+                    <a:pt x="203200" y="326390"/>
+                  </a:lnTo>
+                  <a:lnTo>
+                    <a:pt x="27940" y="201930"/>
+                  </a:lnTo>
+                  <a:lnTo>
+                    <a:pt x="236220" y="254000"/>
+                  </a:lnTo>
+                  <a:lnTo>
+                    <a:pt x="156210" y="54610"/>
+                  </a:lnTo>
+                  <a:lnTo>
+                    <a:pt x="303530" y="210820"/>
+                  </a:lnTo>
+                  <a:close/>
+                </a:path>
+              </a:pathLst>
+            </a:custGeom>
+            <a:solidFill>
+              <a:srgbClr val="FFDE59"/>
+            </a:solidFill>
+          </p:spPr>
+          <p:txBody>
+            <a:bodyPr/>
+            <a:lstStyle/>
+            <a:p>
+              <a:endParaRPr lang="en-RO"/>
+            </a:p>
+          </p:txBody>
+        </p:sp>
+        <p:sp>
+          <p:nvSpPr>
+            <p:cNvPr id="16" name="TextBox 16"/>
+            <p:cNvSpPr txBox="1"/>
+            <p:nvPr/>
+          </p:nvSpPr>
+          <p:spPr>
+            <a:xfrm>
+              <a:off x="203200" y="136525"/>
+              <a:ext cx="279400" cy="346075"/>
+            </a:xfrm>
+            <a:prstGeom prst="rect">
+              <a:avLst/>
+            </a:prstGeom>
+          </p:spPr>
+          <p:txBody>
+            <a:bodyPr lIns="50800" tIns="50800" rIns="50800" bIns="50800" rtlCol="0" anchor="ctr"/>
+            <a:lstStyle/>
+            <a:p>
+              <a:pPr marL="0" lvl="0" indent="0" algn="ctr">
+                <a:lnSpc>
+                  <a:spcPts val="3499"/>
+                </a:lnSpc>
+              </a:pPr>
+              <a:endParaRPr/>
+            </a:p>
+          </p:txBody>
+        </p:sp>
+      </p:grpSp>
+      <p:sp>
+        <p:nvSpPr>
+          <p:cNvPr id="25" name="Rectangle 1">
+            <a:extLst>
+              <a:ext uri="{FF2B5EF4-FFF2-40B4-BE49-F238E27FC236}">
+                <a16:creationId xmlns:a16="http://schemas.microsoft.com/office/drawing/2014/main" id="{411B25B6-AC2B-2489-BCC5-262501D210BD}"/>
+              </a:ext>
+            </a:extLst>
+          </p:cNvPr>
+          <p:cNvSpPr>
+            <a:spLocks noChangeArrowheads="1"/>
+          </p:cNvSpPr>
+          <p:nvPr/>
+        </p:nvSpPr>
+        <p:spPr bwMode="auto">
+          <a:xfrm>
+            <a:off x="876196" y="699291"/>
+            <a:ext cx="8008125" cy="646331"/>
+          </a:xfrm>
+          <a:prstGeom prst="rect">
+            <a:avLst/>
+          </a:prstGeom>
+          <a:noFill/>
+          <a:ln>
+            <a:noFill/>
+          </a:ln>
+          <a:effectLst/>
+          <a:extLst>
+            <a:ext uri="{909E8E84-426E-40DD-AFC4-6F175D3DCCD1}">
+              <a14:hiddenFill xmlns:a14="http://schemas.microsoft.com/office/drawing/2010/main">
+                <a:solidFill>
+                  <a:schemeClr val="accent1"/>
+                </a:solidFill>
+              </a14:hiddenFill>
+            </a:ext>
+            <a:ext uri="{91240B29-F687-4F45-9708-019B960494DF}">
+              <a14:hiddenLine xmlns:a14="http://schemas.microsoft.com/office/drawing/2010/main" w="9525">
+                <a:solidFill>
+                  <a:schemeClr val="tx1"/>
+                </a:solidFill>
+                <a:miter lim="800000"/>
+                <a:headEnd/>
+                <a:tailEnd/>
+              </a14:hiddenLine>
+            </a:ext>
+            <a:ext uri="{AF507438-7753-43E0-B8FC-AC1667EBCBE1}">
+              <a14:hiddenEffects xmlns:a14="http://schemas.microsoft.com/office/drawing/2010/main">
+                <a:effectLst>
+                  <a:outerShdw dist="35921" dir="2700000" algn="ctr" rotWithShape="0">
+                    <a:schemeClr val="bg2"/>
+                  </a:outerShdw>
+                </a:effectLst>
+              </a14:hiddenEffects>
+            </a:ext>
+          </a:extLst>
+        </p:spPr>
+        <p:txBody>
+          <a:bodyPr vert="horz" wrap="square" lIns="91440" tIns="45720" rIns="91440" bIns="45720" numCol="1" anchor="ctr" anchorCtr="0" compatLnSpc="1">
+            <a:prstTxWarp prst="textNoShape">
+              <a:avLst/>
+            </a:prstTxWarp>
+            <a:spAutoFit/>
+          </a:bodyPr>
+          <a:lstStyle/>
+          <a:p>
+            <a:pPr marL="0" marR="0" lvl="0" indent="0" algn="l" defTabSz="914400" rtl="0" eaLnBrk="0" fontAlgn="base" latinLnBrk="0" hangingPunct="0">
+              <a:lnSpc>
+                <a:spcPct val="100000"/>
+              </a:lnSpc>
+              <a:spcBef>
+                <a:spcPct val="0"/>
+              </a:spcBef>
+              <a:spcAft>
+                <a:spcPct val="0"/>
+              </a:spcAft>
+              <a:buClrTx/>
+              <a:buSzTx/>
+              <a:buFontTx/>
+              <a:buNone/>
+              <a:tabLst/>
+            </a:pPr>
+            <a:r>
+              <a:rPr kumimoji="0" lang="en-RO" altLang="en-RO" sz="3640" b="0" i="0" u="none" strike="noStrike" cap="none" normalizeH="0" baseline="0" dirty="0">
+                <a:ln>
+                  <a:noFill/>
+                </a:ln>
+                <a:solidFill>
+                  <a:schemeClr val="bg1"/>
+                </a:solidFill>
+                <a:effectLst/>
+                <a:latin typeface="Abadi MT Condensed Light" panose="020B0306030101010103" pitchFamily="34" charset="77"/>
+              </a:rPr>
+              <a:t>Verificarea</a:t>
+            </a:r>
+            <a:r>
+              <a:rPr kumimoji="0" lang="en-RO" altLang="en-RO" sz="2800" b="0" i="0" u="none" strike="noStrike" cap="none" normalizeH="0" baseline="0" dirty="0">
+                <a:ln>
+                  <a:noFill/>
+                </a:ln>
+                <a:solidFill>
+                  <a:schemeClr val="bg1"/>
+                </a:solidFill>
+                <a:effectLst/>
+                <a:latin typeface="Abadi MT Condensed Light" panose="020B0306030101010103" pitchFamily="34" charset="77"/>
+              </a:rPr>
+              <a:t> și Stabilitatea Algoritmilor</a:t>
+            </a:r>
+          </a:p>
+        </p:txBody>
+      </p:sp>
+      <p:sp>
+        <p:nvSpPr>
+          <p:cNvPr id="26" name="Rectangle 2">
+            <a:extLst>
+              <a:ext uri="{FF2B5EF4-FFF2-40B4-BE49-F238E27FC236}">
+                <a16:creationId xmlns:a16="http://schemas.microsoft.com/office/drawing/2014/main" id="{43579FFE-6904-1416-EC09-FFDCCD50B3FC}"/>
+              </a:ext>
+            </a:extLst>
+          </p:cNvPr>
+          <p:cNvSpPr>
+            <a:spLocks noChangeArrowheads="1"/>
+          </p:cNvSpPr>
+          <p:nvPr/>
+        </p:nvSpPr>
+        <p:spPr bwMode="auto">
+          <a:xfrm>
+            <a:off x="1725007" y="1788280"/>
+            <a:ext cx="7707807" cy="1200329"/>
+          </a:xfrm>
+          <a:prstGeom prst="rect">
+            <a:avLst/>
+          </a:prstGeom>
+          <a:noFill/>
+          <a:ln>
+            <a:noFill/>
+          </a:ln>
+          <a:effectLst/>
+          <a:extLst>
+            <a:ext uri="{909E8E84-426E-40DD-AFC4-6F175D3DCCD1}">
+              <a14:hiddenFill xmlns:a14="http://schemas.microsoft.com/office/drawing/2010/main">
+                <a:solidFill>
+                  <a:schemeClr val="accent1"/>
+                </a:solidFill>
+              </a14:hiddenFill>
+            </a:ext>
+            <a:ext uri="{91240B29-F687-4F45-9708-019B960494DF}">
+              <a14:hiddenLine xmlns:a14="http://schemas.microsoft.com/office/drawing/2010/main" w="9525">
+                <a:solidFill>
+                  <a:schemeClr val="tx1"/>
+                </a:solidFill>
+                <a:miter lim="800000"/>
+                <a:headEnd/>
+                <a:tailEnd/>
+              </a14:hiddenLine>
+            </a:ext>
+            <a:ext uri="{AF507438-7753-43E0-B8FC-AC1667EBCBE1}">
+              <a14:hiddenEffects xmlns:a14="http://schemas.microsoft.com/office/drawing/2010/main">
+                <a:effectLst>
+                  <a:outerShdw dist="35921" dir="2700000" algn="ctr" rotWithShape="0">
+                    <a:schemeClr val="bg2"/>
+                  </a:outerShdw>
+                </a:effectLst>
+              </a14:hiddenEffects>
+            </a:ext>
+          </a:extLst>
+        </p:spPr>
+        <p:txBody>
+          <a:bodyPr vert="horz" wrap="square" lIns="91440" tIns="45720" rIns="91440" bIns="45720" numCol="1" anchor="ctr" anchorCtr="0" compatLnSpc="1">
+            <a:prstTxWarp prst="textNoShape">
+              <a:avLst/>
+            </a:prstTxWarp>
+            <a:spAutoFit/>
+          </a:bodyPr>
+          <a:lstStyle>
+            <a:lvl1pPr eaLnBrk="0" fontAlgn="base" hangingPunct="0">
+              <a:spcBef>
+                <a:spcPct val="0"/>
+              </a:spcBef>
+              <a:spcAft>
+                <a:spcPct val="0"/>
+              </a:spcAft>
+              <a:defRPr>
+                <a:solidFill>
+                  <a:schemeClr val="tx1"/>
+                </a:solidFill>
+                <a:latin typeface="Arial" panose="020B0604020202020204" pitchFamily="34" charset="0"/>
+              </a:defRPr>
+            </a:lvl1pPr>
+            <a:lvl2pPr eaLnBrk="0" fontAlgn="base" hangingPunct="0">
+              <a:spcBef>
+                <a:spcPct val="0"/>
+              </a:spcBef>
+              <a:spcAft>
+                <a:spcPct val="0"/>
+              </a:spcAft>
+              <a:defRPr>
+                <a:solidFill>
+                  <a:schemeClr val="tx1"/>
+                </a:solidFill>
+                <a:latin typeface="Arial" panose="020B0604020202020204" pitchFamily="34" charset="0"/>
+              </a:defRPr>
+            </a:lvl2pPr>
+            <a:lvl3pPr eaLnBrk="0" fontAlgn="base" hangingPunct="0">
+              <a:spcBef>
+                <a:spcPct val="0"/>
+              </a:spcBef>
+              <a:spcAft>
+                <a:spcPct val="0"/>
+              </a:spcAft>
+              <a:defRPr>
+                <a:solidFill>
+                  <a:schemeClr val="tx1"/>
+                </a:solidFill>
+                <a:latin typeface="Arial" panose="020B0604020202020204" pitchFamily="34" charset="0"/>
+              </a:defRPr>
+            </a:lvl3pPr>
+            <a:lvl4pPr eaLnBrk="0" fontAlgn="base" hangingPunct="0">
+              <a:spcBef>
+                <a:spcPct val="0"/>
+              </a:spcBef>
+              <a:spcAft>
+                <a:spcPct val="0"/>
+              </a:spcAft>
+              <a:defRPr>
+                <a:solidFill>
+                  <a:schemeClr val="tx1"/>
+                </a:solidFill>
+                <a:latin typeface="Arial" panose="020B0604020202020204" pitchFamily="34" charset="0"/>
+              </a:defRPr>
+            </a:lvl4pPr>
+            <a:lvl5pPr eaLnBrk="0" fontAlgn="base" hangingPunct="0">
+              <a:spcBef>
+                <a:spcPct val="0"/>
+              </a:spcBef>
+              <a:spcAft>
+                <a:spcPct val="0"/>
+              </a:spcAft>
+              <a:defRPr>
+                <a:solidFill>
+                  <a:schemeClr val="tx1"/>
+                </a:solidFill>
+                <a:latin typeface="Arial" panose="020B0604020202020204" pitchFamily="34" charset="0"/>
+              </a:defRPr>
+            </a:lvl5pPr>
+            <a:lvl6pPr eaLnBrk="0" fontAlgn="base" hangingPunct="0">
+              <a:spcBef>
+                <a:spcPct val="0"/>
+              </a:spcBef>
+              <a:spcAft>
+                <a:spcPct val="0"/>
+              </a:spcAft>
+              <a:defRPr>
+                <a:solidFill>
+                  <a:schemeClr val="tx1"/>
+                </a:solidFill>
+                <a:latin typeface="Arial" panose="020B0604020202020204" pitchFamily="34" charset="0"/>
+              </a:defRPr>
+            </a:lvl6pPr>
+            <a:lvl7pPr eaLnBrk="0" fontAlgn="base" hangingPunct="0">
+              <a:spcBef>
+                <a:spcPct val="0"/>
+              </a:spcBef>
+              <a:spcAft>
+                <a:spcPct val="0"/>
+              </a:spcAft>
+              <a:defRPr>
+                <a:solidFill>
+                  <a:schemeClr val="tx1"/>
+                </a:solidFill>
+                <a:latin typeface="Arial" panose="020B0604020202020204" pitchFamily="34" charset="0"/>
+              </a:defRPr>
+            </a:lvl7pPr>
+            <a:lvl8pPr eaLnBrk="0" fontAlgn="base" hangingPunct="0">
+              <a:spcBef>
+                <a:spcPct val="0"/>
+              </a:spcBef>
+              <a:spcAft>
+                <a:spcPct val="0"/>
+              </a:spcAft>
+              <a:defRPr>
+                <a:solidFill>
+                  <a:schemeClr val="tx1"/>
+                </a:solidFill>
+                <a:latin typeface="Arial" panose="020B0604020202020204" pitchFamily="34" charset="0"/>
+              </a:defRPr>
+            </a:lvl8pPr>
+            <a:lvl9pPr eaLnBrk="0" fontAlgn="base" hangingPunct="0">
+              <a:spcBef>
+                <a:spcPct val="0"/>
+              </a:spcBef>
+              <a:spcAft>
+                <a:spcPct val="0"/>
+              </a:spcAft>
+              <a:defRPr>
+                <a:solidFill>
+                  <a:schemeClr val="tx1"/>
+                </a:solidFill>
+                <a:latin typeface="Arial" panose="020B0604020202020204" pitchFamily="34" charset="0"/>
+              </a:defRPr>
+            </a:lvl9pPr>
+          </a:lstStyle>
+          <a:p>
+            <a:pPr marL="0" marR="0" lvl="0" indent="0" algn="l" defTabSz="914400" rtl="0" eaLnBrk="0" fontAlgn="base" latinLnBrk="0" hangingPunct="0">
+              <a:lnSpc>
+                <a:spcPct val="100000"/>
+              </a:lnSpc>
+              <a:spcBef>
+                <a:spcPct val="0"/>
+              </a:spcBef>
+              <a:spcAft>
+                <a:spcPct val="0"/>
+              </a:spcAft>
+              <a:buClrTx/>
+              <a:buSzTx/>
+              <a:buFontTx/>
+              <a:buNone/>
+              <a:tabLst/>
+            </a:pPr>
+            <a:r>
+              <a:rPr kumimoji="0" lang="en-RO" altLang="en-RO" sz="2400" b="1" i="0" u="none" strike="noStrike" cap="none" normalizeH="0" baseline="0" dirty="0">
+                <a:ln>
+                  <a:noFill/>
+                </a:ln>
+                <a:solidFill>
+                  <a:schemeClr val="bg1"/>
+                </a:solidFill>
+                <a:effectLst/>
+                <a:latin typeface="Arial" panose="020B0604020202020204" pitchFamily="34" charset="0"/>
+              </a:rPr>
+              <a:t>Arhitecturi Evaluate:</a:t>
+            </a:r>
+            <a:r>
+              <a:rPr kumimoji="0" lang="en-RO" altLang="en-RO" sz="2400" b="0" i="0" u="none" strike="noStrike" cap="none" normalizeH="0" baseline="0" dirty="0">
+                <a:ln>
+                  <a:noFill/>
+                </a:ln>
+                <a:solidFill>
+                  <a:schemeClr val="bg1"/>
+                </a:solidFill>
+                <a:effectLst/>
+                <a:latin typeface="Arial" panose="020B0604020202020204" pitchFamily="34" charset="0"/>
+              </a:rPr>
+              <a:t> Testarea și verificarea comparativă a modelelor: </a:t>
+            </a:r>
+            <a:r>
+              <a:rPr kumimoji="0" lang="en-RO" altLang="en-RO" sz="2400" b="0" i="1" u="none" strike="noStrike" cap="none" normalizeH="0" baseline="0" dirty="0">
+                <a:ln>
+                  <a:noFill/>
+                </a:ln>
+                <a:solidFill>
+                  <a:schemeClr val="bg1"/>
+                </a:solidFill>
+                <a:effectLst/>
+                <a:latin typeface="Arial" panose="020B0604020202020204" pitchFamily="34" charset="0"/>
+              </a:rPr>
+              <a:t>LightGBM</a:t>
+            </a:r>
+            <a:r>
+              <a:rPr kumimoji="0" lang="en-RO" altLang="en-RO" sz="2400" b="0" i="0" u="none" strike="noStrike" cap="none" normalizeH="0" baseline="0" dirty="0">
+                <a:ln>
+                  <a:noFill/>
+                </a:ln>
+                <a:solidFill>
+                  <a:schemeClr val="bg1"/>
+                </a:solidFill>
+                <a:effectLst/>
+                <a:latin typeface="Arial" panose="020B0604020202020204" pitchFamily="34" charset="0"/>
+              </a:rPr>
+              <a:t>, </a:t>
+            </a:r>
+            <a:r>
+              <a:rPr kumimoji="0" lang="en-RO" altLang="en-RO" sz="2400" b="0" i="1" u="none" strike="noStrike" cap="none" normalizeH="0" baseline="0" dirty="0">
+                <a:ln>
+                  <a:noFill/>
+                </a:ln>
+                <a:solidFill>
+                  <a:schemeClr val="bg1"/>
+                </a:solidFill>
+                <a:effectLst/>
+                <a:latin typeface="Arial" panose="020B0604020202020204" pitchFamily="34" charset="0"/>
+              </a:rPr>
+              <a:t>XGBoost</a:t>
+            </a:r>
+            <a:r>
+              <a:rPr kumimoji="0" lang="en-RO" altLang="en-RO" sz="2400" b="0" i="0" u="none" strike="noStrike" cap="none" normalizeH="0" baseline="0" dirty="0">
+                <a:ln>
+                  <a:noFill/>
+                </a:ln>
+                <a:solidFill>
+                  <a:schemeClr val="bg1"/>
+                </a:solidFill>
+                <a:effectLst/>
+                <a:latin typeface="Arial" panose="020B0604020202020204" pitchFamily="34" charset="0"/>
+              </a:rPr>
+              <a:t>, </a:t>
+            </a:r>
+            <a:r>
+              <a:rPr kumimoji="0" lang="en-RO" altLang="en-RO" sz="2400" b="0" i="1" u="none" strike="noStrike" cap="none" normalizeH="0" baseline="0" dirty="0">
+                <a:ln>
+                  <a:noFill/>
+                </a:ln>
+                <a:solidFill>
+                  <a:schemeClr val="bg1"/>
+                </a:solidFill>
+                <a:effectLst/>
+                <a:latin typeface="Arial" panose="020B0604020202020204" pitchFamily="34" charset="0"/>
+              </a:rPr>
+              <a:t>Logistic Regression</a:t>
+            </a:r>
+            <a:r>
+              <a:rPr kumimoji="0" lang="en-RO" altLang="en-RO" sz="2400" b="0" i="0" u="none" strike="noStrike" cap="none" normalizeH="0" baseline="0" dirty="0">
+                <a:ln>
+                  <a:noFill/>
+                </a:ln>
+                <a:solidFill>
+                  <a:schemeClr val="bg1"/>
+                </a:solidFill>
+                <a:effectLst/>
+                <a:latin typeface="Arial" panose="020B0604020202020204" pitchFamily="34" charset="0"/>
+              </a:rPr>
+              <a:t> și </a:t>
+            </a:r>
+            <a:r>
+              <a:rPr kumimoji="0" lang="en-RO" altLang="en-RO" sz="2400" b="0" i="1" u="none" strike="noStrike" cap="none" normalizeH="0" baseline="0" dirty="0">
+                <a:ln>
+                  <a:noFill/>
+                </a:ln>
+                <a:solidFill>
+                  <a:schemeClr val="bg1"/>
+                </a:solidFill>
+                <a:effectLst/>
+                <a:latin typeface="Arial" panose="020B0604020202020204" pitchFamily="34" charset="0"/>
+              </a:rPr>
+              <a:t>Random Forest</a:t>
+            </a:r>
+            <a:endParaRPr kumimoji="0" lang="en-RO" altLang="en-RO" sz="2400" b="0" i="0" u="none" strike="noStrike" cap="none" normalizeH="0" baseline="0" dirty="0">
+              <a:ln>
+                <a:noFill/>
+              </a:ln>
+              <a:solidFill>
+                <a:schemeClr val="bg1"/>
+              </a:solidFill>
+              <a:effectLst/>
+              <a:latin typeface="Arial" panose="020B0604020202020204" pitchFamily="34" charset="0"/>
+            </a:endParaRPr>
+          </a:p>
+        </p:txBody>
+      </p:sp>
+      <p:sp>
+        <p:nvSpPr>
+          <p:cNvPr id="28" name="Rectangle 4">
+            <a:extLst>
+              <a:ext uri="{FF2B5EF4-FFF2-40B4-BE49-F238E27FC236}">
+                <a16:creationId xmlns:a16="http://schemas.microsoft.com/office/drawing/2014/main" id="{A41E8831-F751-2399-D1F1-76D3B803F44B}"/>
+              </a:ext>
+            </a:extLst>
+          </p:cNvPr>
+          <p:cNvSpPr>
+            <a:spLocks noChangeArrowheads="1"/>
+          </p:cNvSpPr>
+          <p:nvPr/>
+        </p:nvSpPr>
+        <p:spPr bwMode="auto">
+          <a:xfrm>
+            <a:off x="1745060" y="3285285"/>
+            <a:ext cx="5726248" cy="1569660"/>
+          </a:xfrm>
+          <a:prstGeom prst="rect">
+            <a:avLst/>
+          </a:prstGeom>
+          <a:noFill/>
+          <a:ln>
+            <a:noFill/>
+          </a:ln>
+          <a:effectLst/>
+          <a:extLst>
+            <a:ext uri="{909E8E84-426E-40DD-AFC4-6F175D3DCCD1}">
+              <a14:hiddenFill xmlns:a14="http://schemas.microsoft.com/office/drawing/2010/main">
+                <a:solidFill>
+                  <a:schemeClr val="accent1"/>
+                </a:solidFill>
+              </a14:hiddenFill>
+            </a:ext>
+            <a:ext uri="{91240B29-F687-4F45-9708-019B960494DF}">
+              <a14:hiddenLine xmlns:a14="http://schemas.microsoft.com/office/drawing/2010/main" w="9525">
+                <a:solidFill>
+                  <a:schemeClr val="tx1"/>
+                </a:solidFill>
+                <a:miter lim="800000"/>
+                <a:headEnd/>
+                <a:tailEnd/>
+              </a14:hiddenLine>
+            </a:ext>
+            <a:ext uri="{AF507438-7753-43E0-B8FC-AC1667EBCBE1}">
+              <a14:hiddenEffects xmlns:a14="http://schemas.microsoft.com/office/drawing/2010/main">
+                <a:effectLst>
+                  <a:outerShdw dist="35921" dir="2700000" algn="ctr" rotWithShape="0">
+                    <a:schemeClr val="bg2"/>
+                  </a:outerShdw>
+                </a:effectLst>
+              </a14:hiddenEffects>
+            </a:ext>
+          </a:extLst>
+        </p:spPr>
+        <p:txBody>
+          <a:bodyPr vert="horz" wrap="none" lIns="91440" tIns="45720" rIns="91440" bIns="45720" numCol="1" anchor="ctr" anchorCtr="0" compatLnSpc="1">
+            <a:prstTxWarp prst="textNoShape">
+              <a:avLst/>
+            </a:prstTxWarp>
+            <a:spAutoFit/>
+          </a:bodyPr>
+          <a:lstStyle/>
+          <a:p>
+            <a:pPr marL="0" marR="0" lvl="0" indent="0" algn="l" defTabSz="914400" rtl="0" eaLnBrk="0" fontAlgn="base" latinLnBrk="0" hangingPunct="0">
+              <a:lnSpc>
+                <a:spcPct val="100000"/>
+              </a:lnSpc>
+              <a:spcBef>
+                <a:spcPct val="0"/>
+              </a:spcBef>
+              <a:spcAft>
+                <a:spcPct val="0"/>
+              </a:spcAft>
+              <a:buClrTx/>
+              <a:buSzTx/>
+              <a:buFontTx/>
+              <a:buNone/>
+              <a:tabLst/>
+            </a:pPr>
+            <a:r>
+              <a:rPr kumimoji="0" lang="en-RO" altLang="en-RO" sz="2400" b="1" i="0" u="none" strike="noStrike" cap="none" normalizeH="0" baseline="0" dirty="0">
+                <a:ln>
+                  <a:noFill/>
+                </a:ln>
+                <a:solidFill>
+                  <a:schemeClr val="bg1"/>
+                </a:solidFill>
+                <a:effectLst/>
+                <a:latin typeface="Arial" panose="020B0604020202020204" pitchFamily="34" charset="0"/>
+              </a:rPr>
+              <a:t>Rezultate și Stabilitate (CV Score):</a:t>
+            </a:r>
+            <a:endParaRPr kumimoji="0" lang="en-RO" altLang="en-RO" sz="2400" b="0" i="0" u="none" strike="noStrike" cap="none" normalizeH="0" baseline="0" dirty="0">
+              <a:ln>
+                <a:noFill/>
+              </a:ln>
+              <a:solidFill>
+                <a:schemeClr val="bg1"/>
+              </a:solidFill>
+              <a:effectLst/>
+              <a:latin typeface="Arial" panose="020B0604020202020204" pitchFamily="34" charset="0"/>
+            </a:endParaRPr>
+          </a:p>
+          <a:p>
+            <a:pPr marL="0" marR="0" lvl="0" indent="0" algn="l" defTabSz="914400" rtl="0" eaLnBrk="0" fontAlgn="base" latinLnBrk="0" hangingPunct="0">
+              <a:lnSpc>
+                <a:spcPct val="100000"/>
+              </a:lnSpc>
+              <a:spcBef>
+                <a:spcPct val="0"/>
+              </a:spcBef>
+              <a:spcAft>
+                <a:spcPct val="0"/>
+              </a:spcAft>
+              <a:buClrTx/>
+              <a:buSzTx/>
+              <a:buFontTx/>
+              <a:buChar char="•"/>
+              <a:tabLst/>
+            </a:pPr>
+            <a:r>
+              <a:rPr kumimoji="0" lang="en-RO" altLang="en-RO" sz="2400" b="1" i="0" u="none" strike="noStrike" cap="none" normalizeH="0" baseline="0" dirty="0">
+                <a:ln>
+                  <a:noFill/>
+                </a:ln>
+                <a:solidFill>
+                  <a:schemeClr val="bg1"/>
+                </a:solidFill>
+                <a:effectLst/>
+                <a:latin typeface="Arial" panose="020B0604020202020204" pitchFamily="34" charset="0"/>
+              </a:rPr>
+              <a:t>Stabilitate Medie a Modelului:</a:t>
+            </a:r>
+            <a:r>
+              <a:rPr kumimoji="0" lang="en-RO" altLang="en-RO" sz="2400" b="0" i="0" u="none" strike="noStrike" cap="none" normalizeH="0" baseline="0" dirty="0">
+                <a:ln>
+                  <a:noFill/>
+                </a:ln>
+                <a:solidFill>
+                  <a:schemeClr val="bg1"/>
+                </a:solidFill>
+                <a:effectLst/>
+                <a:latin typeface="Arial" panose="020B0604020202020204" pitchFamily="34" charset="0"/>
+              </a:rPr>
+              <a:t> </a:t>
+            </a:r>
+            <a:r>
+              <a:rPr kumimoji="0" lang="en-RO" altLang="en-RO" sz="2400" b="1" i="0" u="none" strike="noStrike" cap="none" normalizeH="0" baseline="0" dirty="0">
+                <a:ln>
+                  <a:noFill/>
+                </a:ln>
+                <a:solidFill>
+                  <a:schemeClr val="bg1"/>
+                </a:solidFill>
+                <a:effectLst/>
+                <a:latin typeface="Arial" panose="020B0604020202020204" pitchFamily="34" charset="0"/>
+              </a:rPr>
+              <a:t>78.19%</a:t>
+            </a:r>
+            <a:endParaRPr kumimoji="0" lang="en-RO" altLang="en-RO" sz="2400" b="0" i="0" u="none" strike="noStrike" cap="none" normalizeH="0" baseline="0" dirty="0">
+              <a:ln>
+                <a:noFill/>
+              </a:ln>
+              <a:solidFill>
+                <a:schemeClr val="bg1"/>
+              </a:solidFill>
+              <a:effectLst/>
+              <a:latin typeface="Arial" panose="020B0604020202020204" pitchFamily="34" charset="0"/>
+            </a:endParaRPr>
+          </a:p>
+          <a:p>
+            <a:pPr marL="0" marR="0" lvl="0" indent="0" algn="l" defTabSz="914400" rtl="0" eaLnBrk="0" fontAlgn="base" latinLnBrk="0" hangingPunct="0">
+              <a:lnSpc>
+                <a:spcPct val="100000"/>
+              </a:lnSpc>
+              <a:spcBef>
+                <a:spcPct val="0"/>
+              </a:spcBef>
+              <a:spcAft>
+                <a:spcPct val="0"/>
+              </a:spcAft>
+              <a:buClrTx/>
+              <a:buSzTx/>
+              <a:buFontTx/>
+              <a:buChar char="•"/>
+              <a:tabLst/>
+            </a:pPr>
+            <a:r>
+              <a:rPr kumimoji="0" lang="en-RO" altLang="en-RO" sz="2400" b="1" i="0" u="none" strike="noStrike" cap="none" normalizeH="0" baseline="0" dirty="0">
+                <a:ln>
+                  <a:noFill/>
+                </a:ln>
+                <a:solidFill>
+                  <a:schemeClr val="bg1"/>
+                </a:solidFill>
+                <a:effectLst/>
+                <a:latin typeface="Arial" panose="020B0604020202020204" pitchFamily="34" charset="0"/>
+              </a:rPr>
+              <a:t>Deviație Standard:</a:t>
+            </a:r>
+            <a:r>
+              <a:rPr kumimoji="0" lang="en-RO" altLang="en-RO" sz="2400" b="0" i="0" u="none" strike="noStrike" cap="none" normalizeH="0" baseline="0" dirty="0">
+                <a:ln>
+                  <a:noFill/>
+                </a:ln>
+                <a:solidFill>
+                  <a:schemeClr val="bg1"/>
+                </a:solidFill>
+                <a:effectLst/>
+                <a:latin typeface="Arial" panose="020B0604020202020204" pitchFamily="34" charset="0"/>
+              </a:rPr>
+              <a:t> ± </a:t>
+            </a:r>
+            <a:r>
+              <a:rPr kumimoji="0" lang="en-RO" altLang="en-RO" sz="2400" b="1" i="0" u="none" strike="noStrike" cap="none" normalizeH="0" baseline="0" dirty="0">
+                <a:ln>
+                  <a:noFill/>
+                </a:ln>
+                <a:solidFill>
+                  <a:schemeClr val="bg1"/>
+                </a:solidFill>
+                <a:effectLst/>
+                <a:latin typeface="Arial" panose="020B0604020202020204" pitchFamily="34" charset="0"/>
+              </a:rPr>
+              <a:t>5.72%</a:t>
+            </a:r>
+            <a:endParaRPr kumimoji="0" lang="en-RO" altLang="en-RO" sz="2400" b="0" i="0" u="none" strike="noStrike" cap="none" normalizeH="0" baseline="0" dirty="0">
+              <a:ln>
+                <a:noFill/>
+              </a:ln>
+              <a:solidFill>
+                <a:schemeClr val="bg1"/>
+              </a:solidFill>
+              <a:effectLst/>
+              <a:latin typeface="Arial" panose="020B0604020202020204" pitchFamily="34" charset="0"/>
+            </a:endParaRPr>
+          </a:p>
+          <a:p>
+            <a:pPr marL="0" marR="0" lvl="0" indent="0" algn="l" defTabSz="914400" rtl="0" eaLnBrk="0" fontAlgn="base" latinLnBrk="0" hangingPunct="0">
+              <a:lnSpc>
+                <a:spcPct val="100000"/>
+              </a:lnSpc>
+              <a:spcBef>
+                <a:spcPct val="0"/>
+              </a:spcBef>
+              <a:spcAft>
+                <a:spcPct val="0"/>
+              </a:spcAft>
+              <a:buClrTx/>
+              <a:buSzTx/>
+              <a:buFontTx/>
+              <a:buNone/>
+              <a:tabLst/>
+            </a:pPr>
+            <a:endParaRPr kumimoji="0" lang="en-RO" altLang="en-RO" sz="2400" b="0" i="0" u="none" strike="noStrike" cap="none" normalizeH="0" baseline="0" dirty="0">
+              <a:ln>
+                <a:noFill/>
+              </a:ln>
+              <a:solidFill>
+                <a:schemeClr val="bg1"/>
+              </a:solidFill>
+              <a:effectLst/>
+              <a:latin typeface="Arial" panose="020B0604020202020204" pitchFamily="34" charset="0"/>
+            </a:endParaRPr>
+          </a:p>
+        </p:txBody>
+      </p:sp>
+      <p:sp>
+        <p:nvSpPr>
+          <p:cNvPr id="32" name="Rectangle 5">
+            <a:extLst>
+              <a:ext uri="{FF2B5EF4-FFF2-40B4-BE49-F238E27FC236}">
+                <a16:creationId xmlns:a16="http://schemas.microsoft.com/office/drawing/2014/main" id="{63A62D2B-4E00-0551-D64D-5C840AB9E9C0}"/>
+              </a:ext>
+            </a:extLst>
+          </p:cNvPr>
+          <p:cNvSpPr>
+            <a:spLocks noChangeArrowheads="1"/>
+          </p:cNvSpPr>
+          <p:nvPr/>
+        </p:nvSpPr>
+        <p:spPr bwMode="auto">
+          <a:xfrm>
+            <a:off x="1518694" y="5024987"/>
+            <a:ext cx="11556049" cy="2308324"/>
+          </a:xfrm>
+          <a:prstGeom prst="rect">
+            <a:avLst/>
+          </a:prstGeom>
+          <a:noFill/>
+          <a:ln>
+            <a:noFill/>
+          </a:ln>
+          <a:effectLst/>
+          <a:extLst>
+            <a:ext uri="{909E8E84-426E-40DD-AFC4-6F175D3DCCD1}">
+              <a14:hiddenFill xmlns:a14="http://schemas.microsoft.com/office/drawing/2010/main">
+                <a:solidFill>
+                  <a:schemeClr val="accent1"/>
+                </a:solidFill>
+              </a14:hiddenFill>
+            </a:ext>
+            <a:ext uri="{91240B29-F687-4F45-9708-019B960494DF}">
+              <a14:hiddenLine xmlns:a14="http://schemas.microsoft.com/office/drawing/2010/main" w="9525">
+                <a:solidFill>
+                  <a:schemeClr val="tx1"/>
+                </a:solidFill>
+                <a:miter lim="800000"/>
+                <a:headEnd/>
+                <a:tailEnd/>
+              </a14:hiddenLine>
+            </a:ext>
+            <a:ext uri="{AF507438-7753-43E0-B8FC-AC1667EBCBE1}">
+              <a14:hiddenEffects xmlns:a14="http://schemas.microsoft.com/office/drawing/2010/main">
+                <a:effectLst>
+                  <a:outerShdw dist="35921" dir="2700000" algn="ctr" rotWithShape="0">
+                    <a:schemeClr val="bg2"/>
+                  </a:outerShdw>
+                </a:effectLst>
+              </a14:hiddenEffects>
+            </a:ext>
+          </a:extLst>
+        </p:spPr>
+        <p:txBody>
+          <a:bodyPr vert="horz" wrap="none" lIns="91440" tIns="45720" rIns="91440" bIns="45720" numCol="1" anchor="ctr" anchorCtr="0" compatLnSpc="1">
+            <a:prstTxWarp prst="textNoShape">
+              <a:avLst/>
+            </a:prstTxWarp>
+            <a:spAutoFit/>
+          </a:bodyPr>
+          <a:lstStyle/>
+          <a:p>
+            <a:pPr marL="0" marR="0" lvl="0" indent="0" algn="l" defTabSz="914400" rtl="0" eaLnBrk="0" fontAlgn="base" latinLnBrk="0" hangingPunct="0">
+              <a:lnSpc>
+                <a:spcPct val="100000"/>
+              </a:lnSpc>
+              <a:spcBef>
+                <a:spcPct val="0"/>
+              </a:spcBef>
+              <a:spcAft>
+                <a:spcPct val="0"/>
+              </a:spcAft>
+              <a:buClrTx/>
+              <a:buSzTx/>
+              <a:buFontTx/>
+              <a:buNone/>
+              <a:tabLst/>
+            </a:pPr>
+            <a:r>
+              <a:rPr kumimoji="0" lang="en-RO" altLang="en-RO" sz="2400" b="1" i="0" u="none" strike="noStrike" cap="none" normalizeH="0" baseline="0" dirty="0">
+                <a:ln>
+                  <a:noFill/>
+                </a:ln>
+                <a:solidFill>
+                  <a:schemeClr val="bg1"/>
+                </a:solidFill>
+                <a:effectLst/>
+                <a:latin typeface="Arial" panose="020B0604020202020204" pitchFamily="34" charset="0"/>
+              </a:rPr>
+              <a:t>Performanța pe Setul de Test (Prag Standard 0.5):</a:t>
+            </a:r>
+            <a:endParaRPr kumimoji="0" lang="en-RO" altLang="en-RO" sz="2400" b="0" i="0" u="none" strike="noStrike" cap="none" normalizeH="0" baseline="0" dirty="0">
+              <a:ln>
+                <a:noFill/>
+              </a:ln>
+              <a:solidFill>
+                <a:schemeClr val="bg1"/>
+              </a:solidFill>
+              <a:effectLst/>
+              <a:latin typeface="Arial" panose="020B0604020202020204" pitchFamily="34" charset="0"/>
+            </a:endParaRPr>
+          </a:p>
+          <a:p>
+            <a:pPr marL="0" marR="0" lvl="0" indent="0" algn="l" defTabSz="914400" rtl="0" eaLnBrk="0" fontAlgn="base" latinLnBrk="0" hangingPunct="0">
+              <a:lnSpc>
+                <a:spcPct val="100000"/>
+              </a:lnSpc>
+              <a:spcBef>
+                <a:spcPct val="0"/>
+              </a:spcBef>
+              <a:spcAft>
+                <a:spcPct val="0"/>
+              </a:spcAft>
+              <a:buClrTx/>
+              <a:buSzTx/>
+              <a:buFontTx/>
+              <a:buChar char="•"/>
+              <a:tabLst/>
+            </a:pPr>
+            <a:r>
+              <a:rPr kumimoji="0" lang="en-RO" altLang="en-RO" sz="2400" b="1" i="0" u="none" strike="noStrike" cap="none" normalizeH="0" baseline="0" dirty="0">
+                <a:ln>
+                  <a:noFill/>
+                </a:ln>
+                <a:solidFill>
+                  <a:schemeClr val="bg1"/>
+                </a:solidFill>
+                <a:effectLst/>
+                <a:latin typeface="Arial" panose="020B0604020202020204" pitchFamily="34" charset="0"/>
+              </a:rPr>
+              <a:t>LightGBM:</a:t>
+            </a:r>
+            <a:r>
+              <a:rPr kumimoji="0" lang="en-RO" altLang="en-RO" sz="2400" b="0" i="0" u="none" strike="noStrike" cap="none" normalizeH="0" baseline="0" dirty="0">
+                <a:ln>
+                  <a:noFill/>
+                </a:ln>
+                <a:solidFill>
+                  <a:schemeClr val="bg1"/>
+                </a:solidFill>
+                <a:effectLst/>
+                <a:latin typeface="Arial" panose="020B0604020202020204" pitchFamily="34" charset="0"/>
+              </a:rPr>
+              <a:t> Acuratețe maximă globală (</a:t>
+            </a:r>
+            <a:r>
+              <a:rPr kumimoji="0" lang="en-RO" altLang="en-RO" sz="2400" b="1" i="0" u="none" strike="noStrike" cap="none" normalizeH="0" baseline="0" dirty="0">
+                <a:ln>
+                  <a:noFill/>
+                </a:ln>
+                <a:solidFill>
+                  <a:schemeClr val="bg1"/>
+                </a:solidFill>
+                <a:effectLst/>
+                <a:latin typeface="Arial" panose="020B0604020202020204" pitchFamily="34" charset="0"/>
+              </a:rPr>
+              <a:t>77.00%</a:t>
+            </a:r>
+            <a:r>
+              <a:rPr kumimoji="0" lang="en-RO" altLang="en-RO" sz="2400" b="0" i="0" u="none" strike="noStrike" cap="none" normalizeH="0" baseline="0" dirty="0">
+                <a:ln>
+                  <a:noFill/>
+                </a:ln>
+                <a:solidFill>
+                  <a:schemeClr val="bg1"/>
+                </a:solidFill>
+                <a:effectLst/>
+                <a:latin typeface="Arial" panose="020B0604020202020204" pitchFamily="34" charset="0"/>
+              </a:rPr>
+              <a:t>) | AUC: </a:t>
+            </a:r>
+            <a:r>
+              <a:rPr kumimoji="0" lang="en-RO" altLang="en-RO" sz="2400" b="1" i="0" u="none" strike="noStrike" cap="none" normalizeH="0" baseline="0" dirty="0">
+                <a:ln>
+                  <a:noFill/>
+                </a:ln>
+                <a:solidFill>
+                  <a:schemeClr val="bg1"/>
+                </a:solidFill>
+                <a:effectLst/>
+                <a:latin typeface="Arial" panose="020B0604020202020204" pitchFamily="34" charset="0"/>
+              </a:rPr>
+              <a:t>0.73</a:t>
+            </a:r>
+            <a:r>
+              <a:rPr kumimoji="0" lang="en-RO" altLang="en-RO" sz="2400" b="0" i="0" u="none" strike="noStrike" cap="none" normalizeH="0" baseline="0" dirty="0">
+                <a:ln>
+                  <a:noFill/>
+                </a:ln>
+                <a:solidFill>
+                  <a:schemeClr val="bg1"/>
+                </a:solidFill>
+                <a:effectLst/>
+                <a:latin typeface="Arial" panose="020B0604020202020204" pitchFamily="34" charset="0"/>
+              </a:rPr>
+              <a:t> | Recall scăzut (44%).</a:t>
+            </a:r>
+          </a:p>
+          <a:p>
+            <a:pPr marL="0" marR="0" lvl="0" indent="0" algn="l" defTabSz="914400" rtl="0" eaLnBrk="0" fontAlgn="base" latinLnBrk="0" hangingPunct="0">
+              <a:lnSpc>
+                <a:spcPct val="100000"/>
+              </a:lnSpc>
+              <a:spcBef>
+                <a:spcPct val="0"/>
+              </a:spcBef>
+              <a:spcAft>
+                <a:spcPct val="0"/>
+              </a:spcAft>
+              <a:buClrTx/>
+              <a:buSzTx/>
+              <a:buFontTx/>
+              <a:buChar char="•"/>
+              <a:tabLst/>
+            </a:pPr>
+            <a:r>
+              <a:rPr kumimoji="0" lang="en-RO" altLang="en-RO" sz="2400" b="1" i="0" u="none" strike="noStrike" cap="none" normalizeH="0" baseline="0" dirty="0">
+                <a:ln>
+                  <a:noFill/>
+                </a:ln>
+                <a:solidFill>
+                  <a:schemeClr val="bg1"/>
+                </a:solidFill>
+                <a:effectLst/>
+                <a:latin typeface="Arial" panose="020B0604020202020204" pitchFamily="34" charset="0"/>
+              </a:rPr>
+              <a:t>XGBoost (Standard):</a:t>
+            </a:r>
+            <a:r>
+              <a:rPr kumimoji="0" lang="en-RO" altLang="en-RO" sz="2400" b="0" i="0" u="none" strike="noStrike" cap="none" normalizeH="0" baseline="0" dirty="0">
+                <a:ln>
+                  <a:noFill/>
+                </a:ln>
+                <a:solidFill>
+                  <a:schemeClr val="bg1"/>
+                </a:solidFill>
+                <a:effectLst/>
+                <a:latin typeface="Arial" panose="020B0604020202020204" pitchFamily="34" charset="0"/>
+              </a:rPr>
+              <a:t> Acuratețe de </a:t>
+            </a:r>
+            <a:r>
+              <a:rPr kumimoji="0" lang="en-RO" altLang="en-RO" sz="2400" b="1" i="0" u="none" strike="noStrike" cap="none" normalizeH="0" baseline="0" dirty="0">
+                <a:ln>
+                  <a:noFill/>
+                </a:ln>
+                <a:solidFill>
+                  <a:schemeClr val="bg1"/>
+                </a:solidFill>
+                <a:effectLst/>
+                <a:latin typeface="Arial" panose="020B0604020202020204" pitchFamily="34" charset="0"/>
+              </a:rPr>
+              <a:t>70.67%</a:t>
+            </a:r>
+            <a:r>
+              <a:rPr kumimoji="0" lang="en-RO" altLang="en-RO" sz="2400" b="0" i="0" u="none" strike="noStrike" cap="none" normalizeH="0" baseline="0" dirty="0">
+                <a:ln>
+                  <a:noFill/>
+                </a:ln>
+                <a:solidFill>
+                  <a:schemeClr val="bg1"/>
+                </a:solidFill>
+                <a:effectLst/>
+                <a:latin typeface="Arial" panose="020B0604020202020204" pitchFamily="34" charset="0"/>
+              </a:rPr>
+              <a:t> | AUC: </a:t>
+            </a:r>
+            <a:r>
+              <a:rPr kumimoji="0" lang="en-RO" altLang="en-RO" sz="2400" b="1" i="0" u="none" strike="noStrike" cap="none" normalizeH="0" baseline="0" dirty="0">
+                <a:ln>
+                  <a:noFill/>
+                </a:ln>
+                <a:solidFill>
+                  <a:schemeClr val="bg1"/>
+                </a:solidFill>
+                <a:effectLst/>
+                <a:latin typeface="Arial" panose="020B0604020202020204" pitchFamily="34" charset="0"/>
+              </a:rPr>
+              <a:t>0.72</a:t>
+            </a:r>
+            <a:r>
+              <a:rPr kumimoji="0" lang="en-RO" altLang="en-RO" sz="2400" b="0" i="0" u="none" strike="noStrike" cap="none" normalizeH="0" baseline="0" dirty="0">
+                <a:ln>
+                  <a:noFill/>
+                </a:ln>
+                <a:solidFill>
+                  <a:schemeClr val="bg1"/>
+                </a:solidFill>
+                <a:effectLst/>
+                <a:latin typeface="Arial" panose="020B0604020202020204" pitchFamily="34" charset="0"/>
+              </a:rPr>
+              <a:t> | Recall: 40%.</a:t>
+            </a:r>
+          </a:p>
+          <a:p>
+            <a:pPr marL="0" marR="0" lvl="0" indent="0" algn="l" defTabSz="914400" rtl="0" eaLnBrk="0" fontAlgn="base" latinLnBrk="0" hangingPunct="0">
+              <a:lnSpc>
+                <a:spcPct val="100000"/>
+              </a:lnSpc>
+              <a:spcBef>
+                <a:spcPct val="0"/>
+              </a:spcBef>
+              <a:spcAft>
+                <a:spcPct val="0"/>
+              </a:spcAft>
+              <a:buClrTx/>
+              <a:buSzTx/>
+              <a:buFontTx/>
+              <a:buChar char="•"/>
+              <a:tabLst/>
+            </a:pPr>
+            <a:r>
+              <a:rPr kumimoji="0" lang="en-RO" altLang="en-RO" sz="2400" b="1" i="0" u="none" strike="noStrike" cap="none" normalizeH="0" baseline="0" dirty="0">
+                <a:ln>
+                  <a:noFill/>
+                </a:ln>
+                <a:solidFill>
+                  <a:schemeClr val="bg1"/>
+                </a:solidFill>
+                <a:effectLst/>
+                <a:latin typeface="Arial" panose="020B0604020202020204" pitchFamily="34" charset="0"/>
+              </a:rPr>
+              <a:t>Logistic Regression:</a:t>
+            </a:r>
+            <a:r>
+              <a:rPr kumimoji="0" lang="en-RO" altLang="en-RO" sz="2400" b="0" i="0" u="none" strike="noStrike" cap="none" normalizeH="0" baseline="0" dirty="0">
+                <a:ln>
+                  <a:noFill/>
+                </a:ln>
+                <a:solidFill>
+                  <a:schemeClr val="bg1"/>
+                </a:solidFill>
+                <a:effectLst/>
+                <a:latin typeface="Arial" panose="020B0604020202020204" pitchFamily="34" charset="0"/>
+              </a:rPr>
+              <a:t> Acuratețe de </a:t>
+            </a:r>
+            <a:r>
+              <a:rPr kumimoji="0" lang="en-RO" altLang="en-RO" sz="2400" b="1" i="0" u="none" strike="noStrike" cap="none" normalizeH="0" baseline="0" dirty="0">
+                <a:ln>
+                  <a:noFill/>
+                </a:ln>
+                <a:solidFill>
+                  <a:schemeClr val="bg1"/>
+                </a:solidFill>
+                <a:effectLst/>
+                <a:latin typeface="Arial" panose="020B0604020202020204" pitchFamily="34" charset="0"/>
+              </a:rPr>
+              <a:t>69.33%</a:t>
+            </a:r>
+            <a:r>
+              <a:rPr kumimoji="0" lang="en-RO" altLang="en-RO" sz="2400" b="0" i="0" u="none" strike="noStrike" cap="none" normalizeH="0" baseline="0" dirty="0">
+                <a:ln>
+                  <a:noFill/>
+                </a:ln>
+                <a:solidFill>
+                  <a:schemeClr val="bg1"/>
+                </a:solidFill>
+                <a:effectLst/>
+                <a:latin typeface="Arial" panose="020B0604020202020204" pitchFamily="34" charset="0"/>
+              </a:rPr>
+              <a:t> | F1-Score: 0.55.</a:t>
+            </a:r>
+          </a:p>
+          <a:p>
+            <a:pPr marL="0" marR="0" lvl="0" indent="0" algn="l" defTabSz="914400" rtl="0" eaLnBrk="0" fontAlgn="base" latinLnBrk="0" hangingPunct="0">
+              <a:lnSpc>
+                <a:spcPct val="100000"/>
+              </a:lnSpc>
+              <a:spcBef>
+                <a:spcPct val="0"/>
+              </a:spcBef>
+              <a:spcAft>
+                <a:spcPct val="0"/>
+              </a:spcAft>
+              <a:buClrTx/>
+              <a:buSzTx/>
+              <a:buFontTx/>
+              <a:buChar char="•"/>
+              <a:tabLst/>
+            </a:pPr>
+            <a:r>
+              <a:rPr kumimoji="0" lang="en-RO" altLang="en-RO" sz="2400" b="1" i="0" u="none" strike="noStrike" cap="none" normalizeH="0" baseline="0" dirty="0">
+                <a:ln>
+                  <a:noFill/>
+                </a:ln>
+                <a:solidFill>
+                  <a:schemeClr val="bg1"/>
+                </a:solidFill>
+                <a:effectLst/>
+                <a:latin typeface="Arial" panose="020B0604020202020204" pitchFamily="34" charset="0"/>
+              </a:rPr>
+              <a:t>Random Forest:</a:t>
+            </a:r>
+            <a:r>
+              <a:rPr kumimoji="0" lang="en-RO" altLang="en-RO" sz="2400" b="0" i="0" u="none" strike="noStrike" cap="none" normalizeH="0" baseline="0" dirty="0">
+                <a:ln>
+                  <a:noFill/>
+                </a:ln>
+                <a:solidFill>
+                  <a:schemeClr val="bg1"/>
+                </a:solidFill>
+                <a:effectLst/>
+                <a:latin typeface="Arial" panose="020B0604020202020204" pitchFamily="34" charset="0"/>
+              </a:rPr>
+              <a:t> Acuratețe de </a:t>
+            </a:r>
+            <a:r>
+              <a:rPr kumimoji="0" lang="en-RO" altLang="en-RO" sz="2400" b="1" i="0" u="none" strike="noStrike" cap="none" normalizeH="0" baseline="0" dirty="0">
+                <a:ln>
+                  <a:noFill/>
+                </a:ln>
+                <a:solidFill>
+                  <a:schemeClr val="bg1"/>
+                </a:solidFill>
+                <a:effectLst/>
+                <a:latin typeface="Arial" panose="020B0604020202020204" pitchFamily="34" charset="0"/>
+              </a:rPr>
+              <a:t>68.66%</a:t>
+            </a:r>
+            <a:r>
+              <a:rPr kumimoji="0" lang="en-RO" altLang="en-RO" sz="2400" b="0" i="0" u="none" strike="noStrike" cap="none" normalizeH="0" baseline="0" dirty="0">
+                <a:ln>
+                  <a:noFill/>
+                </a:ln>
+                <a:solidFill>
+                  <a:schemeClr val="bg1"/>
+                </a:solidFill>
+                <a:effectLst/>
+                <a:latin typeface="Arial" panose="020B0604020202020204" pitchFamily="34" charset="0"/>
+              </a:rPr>
+              <a:t> | F1-Score: 0.47.</a:t>
+            </a:r>
+          </a:p>
+          <a:p>
+            <a:pPr marL="0" marR="0" lvl="0" indent="0" algn="l" defTabSz="914400" rtl="0" eaLnBrk="0" fontAlgn="base" latinLnBrk="0" hangingPunct="0">
+              <a:lnSpc>
+                <a:spcPct val="100000"/>
+              </a:lnSpc>
+              <a:spcBef>
+                <a:spcPct val="0"/>
+              </a:spcBef>
+              <a:spcAft>
+                <a:spcPct val="0"/>
+              </a:spcAft>
+              <a:buClrTx/>
+              <a:buSzTx/>
+              <a:buFontTx/>
+              <a:buNone/>
+              <a:tabLst/>
+            </a:pPr>
+            <a:endParaRPr kumimoji="0" lang="en-RO" altLang="en-RO" sz="2400" b="0" i="0" u="none" strike="noStrike" cap="none" normalizeH="0" baseline="0" dirty="0">
+              <a:ln>
+                <a:noFill/>
+              </a:ln>
+              <a:solidFill>
+                <a:schemeClr val="bg1"/>
+              </a:solidFill>
+              <a:effectLst/>
+              <a:latin typeface="Arial" panose="020B0604020202020204" pitchFamily="34" charset="0"/>
+            </a:endParaRPr>
+          </a:p>
+        </p:txBody>
+      </p:sp>
+      <p:pic>
+        <p:nvPicPr>
+          <p:cNvPr id="34" name="Picture 33">
+            <a:extLst>
+              <a:ext uri="{FF2B5EF4-FFF2-40B4-BE49-F238E27FC236}">
+                <a16:creationId xmlns:a16="http://schemas.microsoft.com/office/drawing/2014/main" id="{1EB69F46-7645-208C-8CD5-A3BD653A54B0}"/>
+              </a:ext>
+            </a:extLst>
+          </p:cNvPr>
+          <p:cNvPicPr>
+            <a:picLocks noChangeAspect="1"/>
+          </p:cNvPicPr>
+          <p:nvPr/>
+        </p:nvPicPr>
+        <p:blipFill>
+          <a:blip r:embed="rId3">
+            <a:extLst>
+              <a:ext uri="{28A0092B-C50C-407E-A947-70E740481C1C}">
+                <a14:useLocalDpi xmlns:a14="http://schemas.microsoft.com/office/drawing/2010/main" val="0"/>
+              </a:ext>
+            </a:extLst>
+          </a:blip>
+          <a:stretch>
+            <a:fillRect/>
+          </a:stretch>
+        </p:blipFill>
+        <p:spPr>
+          <a:xfrm>
+            <a:off x="11163971" y="2276654"/>
+            <a:ext cx="6591300" cy="1460500"/>
+          </a:xfrm>
+          <a:prstGeom prst="rect">
+            <a:avLst/>
+          </a:prstGeom>
+        </p:spPr>
+      </p:pic>
+      <p:pic>
+        <p:nvPicPr>
+          <p:cNvPr id="38" name="Picture 37">
+            <a:extLst>
+              <a:ext uri="{FF2B5EF4-FFF2-40B4-BE49-F238E27FC236}">
+                <a16:creationId xmlns:a16="http://schemas.microsoft.com/office/drawing/2014/main" id="{C0CB768D-CDE5-5620-A6A8-E238ECF56AD0}"/>
+              </a:ext>
+            </a:extLst>
+          </p:cNvPr>
+          <p:cNvPicPr>
+            <a:picLocks noChangeAspect="1"/>
+          </p:cNvPicPr>
+          <p:nvPr/>
+        </p:nvPicPr>
+        <p:blipFill>
+          <a:blip r:embed="rId4">
+            <a:extLst>
+              <a:ext uri="{28A0092B-C50C-407E-A947-70E740481C1C}">
+                <a14:useLocalDpi xmlns:a14="http://schemas.microsoft.com/office/drawing/2010/main" val="0"/>
+              </a:ext>
+            </a:extLst>
+          </a:blip>
+          <a:stretch>
+            <a:fillRect/>
+          </a:stretch>
+        </p:blipFill>
+        <p:spPr>
+          <a:xfrm>
+            <a:off x="0" y="9057223"/>
+            <a:ext cx="11870784" cy="1200507"/>
+          </a:xfrm>
+          <a:prstGeom prst="rect">
+            <a:avLst/>
+          </a:prstGeom>
+        </p:spPr>
+      </p:pic>
+      <p:pic>
+        <p:nvPicPr>
+          <p:cNvPr id="36" name="Picture 35">
+            <a:extLst>
+              <a:ext uri="{FF2B5EF4-FFF2-40B4-BE49-F238E27FC236}">
+                <a16:creationId xmlns:a16="http://schemas.microsoft.com/office/drawing/2014/main" id="{2A7E5E22-97ED-2CAF-112C-0E41AC553886}"/>
+              </a:ext>
+            </a:extLst>
+          </p:cNvPr>
+          <p:cNvPicPr>
+            <a:picLocks noChangeAspect="1"/>
+          </p:cNvPicPr>
+          <p:nvPr/>
+        </p:nvPicPr>
+        <p:blipFill>
+          <a:blip r:embed="rId5">
+            <a:extLst>
+              <a:ext uri="{28A0092B-C50C-407E-A947-70E740481C1C}">
+                <a14:useLocalDpi xmlns:a14="http://schemas.microsoft.com/office/drawing/2010/main" val="0"/>
+              </a:ext>
+            </a:extLst>
+          </a:blip>
+          <a:stretch>
+            <a:fillRect/>
+          </a:stretch>
+        </p:blipFill>
+        <p:spPr>
+          <a:xfrm>
+            <a:off x="11353800" y="7503353"/>
+            <a:ext cx="6934200" cy="2766329"/>
+          </a:xfrm>
+          <a:prstGeom prst="rect">
+            <a:avLst/>
+          </a:prstGeom>
+        </p:spPr>
+      </p:pic>
+    </p:spTree>
+  </p:cSld>
+  <p:clrMapOvr>
+    <a:masterClrMapping/>
+  </p:clrMapOvr>
+</p:sld>
+</file>
+
+<file path=ppt/slides/slide6.xml><?xml version="1.0" encoding="utf-8"?>
 <p:sld xmlns:a="http://schemas.openxmlformats.org/drawingml/2006/main" xmlns:r="http://schemas.openxmlformats.org/officeDocument/2006/relationships" xmlns:p="http://schemas.openxmlformats.org/presentationml/2006/main">
   <p:cSld>
     <p:bg>
@@ -5617,10 +7642,10 @@
             </a:pathLst>
           </a:custGeom>
           <a:blipFill>
-            <a:blip r:embed="rId3">
+            <a:blip>
               <a:extLst>
                 <a:ext uri="{96DAC541-7B7A-43D3-8B79-37D633B846F1}">
-                  <asvg:svgBlip xmlns:asvg="http://schemas.microsoft.com/office/drawing/2016/SVG/main" r:embed="rId4"/>
+                  <asvg:svgBlip xmlns:asvg="http://schemas.microsoft.com/office/drawing/2016/SVG/main" r:embed="rId3"/>
                 </a:ext>
               </a:extLst>
             </a:blip>
@@ -7146,7 +9171,7 @@
 </p:sld>
 </file>
 
-<file path=ppt/slides/slide6.xml><?xml version="1.0" encoding="utf-8"?>
+<file path=ppt/slides/slide7.xml><?xml version="1.0" encoding="utf-8"?>
 <p:sld xmlns:a="http://schemas.openxmlformats.org/drawingml/2006/main" xmlns:r="http://schemas.openxmlformats.org/officeDocument/2006/relationships" xmlns:p="http://schemas.openxmlformats.org/presentationml/2006/main">
   <p:cSld>
     <p:bg>
@@ -7159,7 +9184,13 @@
     </p:bg>
     <p:spTree>
       <p:nvGrpSpPr>
-        <p:cNvPr id="1" name=""/>
+        <p:cNvPr id="1" name="">
+          <a:extLst>
+            <a:ext uri="{FF2B5EF4-FFF2-40B4-BE49-F238E27FC236}">
+              <a16:creationId xmlns:a16="http://schemas.microsoft.com/office/drawing/2014/main" id="{8B6DBBA4-75E5-4498-18F9-C3FA85909957}"/>
+            </a:ext>
+          </a:extLst>
+        </p:cNvPr>
         <p:cNvGrpSpPr/>
         <p:nvPr/>
       </p:nvGrpSpPr>
@@ -7173,7 +9204,13 @@
       </p:grpSpPr>
       <p:sp>
         <p:nvSpPr>
-          <p:cNvPr id="2" name="Freeform 2"/>
+          <p:cNvPr id="2" name="Freeform 2">
+            <a:extLst>
+              <a:ext uri="{FF2B5EF4-FFF2-40B4-BE49-F238E27FC236}">
+                <a16:creationId xmlns:a16="http://schemas.microsoft.com/office/drawing/2014/main" id="{305C801B-B7C2-66A4-EF1F-3D8333B591EF}"/>
+              </a:ext>
+            </a:extLst>
+          </p:cNvPr>
           <p:cNvSpPr/>
           <p:nvPr/>
         </p:nvSpPr>
@@ -7210,10 +9247,10 @@
             </a:pathLst>
           </a:custGeom>
           <a:blipFill>
-            <a:blip r:embed="rId2">
+            <a:blip>
               <a:extLst>
                 <a:ext uri="{96DAC541-7B7A-43D3-8B79-37D633B846F1}">
-                  <asvg:svgBlip xmlns:asvg="http://schemas.microsoft.com/office/drawing/2016/SVG/main" r:embed="rId3"/>
+                  <asvg:svgBlip xmlns:asvg="http://schemas.microsoft.com/office/drawing/2016/SVG/main" r:embed="rId2"/>
                 </a:ext>
               </a:extLst>
             </a:blip>
@@ -7232,7 +9269,13 @@
       </p:sp>
       <p:grpSp>
         <p:nvGrpSpPr>
-          <p:cNvPr id="3" name="Group 3"/>
+          <p:cNvPr id="3" name="Group 3">
+            <a:extLst>
+              <a:ext uri="{FF2B5EF4-FFF2-40B4-BE49-F238E27FC236}">
+                <a16:creationId xmlns:a16="http://schemas.microsoft.com/office/drawing/2014/main" id="{33AFE472-2BEA-0040-9030-3F131F0E8C93}"/>
+              </a:ext>
+            </a:extLst>
+          </p:cNvPr>
           <p:cNvGrpSpPr/>
           <p:nvPr/>
         </p:nvGrpSpPr>
@@ -7246,7 +9289,13 @@
         </p:grpSpPr>
         <p:sp>
           <p:nvSpPr>
-            <p:cNvPr id="4" name="Freeform 4"/>
+            <p:cNvPr id="4" name="Freeform 4">
+              <a:extLst>
+                <a:ext uri="{FF2B5EF4-FFF2-40B4-BE49-F238E27FC236}">
+                  <a16:creationId xmlns:a16="http://schemas.microsoft.com/office/drawing/2014/main" id="{8CB7070E-B1A4-14AF-A5FA-ACB2BC7CE539}"/>
+                </a:ext>
+              </a:extLst>
+            </p:cNvPr>
             <p:cNvSpPr/>
             <p:nvPr/>
           </p:nvSpPr>
@@ -7347,7 +9396,13 @@
         </p:sp>
         <p:sp>
           <p:nvSpPr>
-            <p:cNvPr id="5" name="TextBox 5"/>
+            <p:cNvPr id="5" name="TextBox 5">
+              <a:extLst>
+                <a:ext uri="{FF2B5EF4-FFF2-40B4-BE49-F238E27FC236}">
+                  <a16:creationId xmlns:a16="http://schemas.microsoft.com/office/drawing/2014/main" id="{F3C9277A-C985-AF01-16CA-7C902CFEA7FF}"/>
+                </a:ext>
+              </a:extLst>
+            </p:cNvPr>
             <p:cNvSpPr txBox="1"/>
             <p:nvPr/>
           </p:nvSpPr>
@@ -7376,7 +9431,13 @@
       </p:grpSp>
       <p:grpSp>
         <p:nvGrpSpPr>
-          <p:cNvPr id="6" name="Group 6"/>
+          <p:cNvPr id="6" name="Group 6">
+            <a:extLst>
+              <a:ext uri="{FF2B5EF4-FFF2-40B4-BE49-F238E27FC236}">
+                <a16:creationId xmlns:a16="http://schemas.microsoft.com/office/drawing/2014/main" id="{A00E02CE-D9E9-7100-8752-146CAFF1C230}"/>
+              </a:ext>
+            </a:extLst>
+          </p:cNvPr>
           <p:cNvGrpSpPr/>
           <p:nvPr/>
         </p:nvGrpSpPr>
@@ -7390,7 +9451,13 @@
         </p:grpSpPr>
         <p:sp>
           <p:nvSpPr>
-            <p:cNvPr id="7" name="Freeform 7"/>
+            <p:cNvPr id="7" name="Freeform 7">
+              <a:extLst>
+                <a:ext uri="{FF2B5EF4-FFF2-40B4-BE49-F238E27FC236}">
+                  <a16:creationId xmlns:a16="http://schemas.microsoft.com/office/drawing/2014/main" id="{C3739980-9B07-BDA8-0114-4952F4F58FD7}"/>
+                </a:ext>
+              </a:extLst>
+            </p:cNvPr>
             <p:cNvSpPr/>
             <p:nvPr/>
           </p:nvSpPr>
@@ -7491,7 +9558,13 @@
         </p:sp>
         <p:sp>
           <p:nvSpPr>
-            <p:cNvPr id="8" name="TextBox 8"/>
+            <p:cNvPr id="8" name="TextBox 8">
+              <a:extLst>
+                <a:ext uri="{FF2B5EF4-FFF2-40B4-BE49-F238E27FC236}">
+                  <a16:creationId xmlns:a16="http://schemas.microsoft.com/office/drawing/2014/main" id="{31AD3788-2B19-9942-79F5-3D73DB48918C}"/>
+                </a:ext>
+              </a:extLst>
+            </p:cNvPr>
             <p:cNvSpPr txBox="1"/>
             <p:nvPr/>
           </p:nvSpPr>
@@ -7520,7 +9593,13 @@
       </p:grpSp>
       <p:grpSp>
         <p:nvGrpSpPr>
-          <p:cNvPr id="9" name="Group 9"/>
+          <p:cNvPr id="9" name="Group 9">
+            <a:extLst>
+              <a:ext uri="{FF2B5EF4-FFF2-40B4-BE49-F238E27FC236}">
+                <a16:creationId xmlns:a16="http://schemas.microsoft.com/office/drawing/2014/main" id="{782C462F-6B21-6177-A184-B93400A40811}"/>
+              </a:ext>
+            </a:extLst>
+          </p:cNvPr>
           <p:cNvGrpSpPr/>
           <p:nvPr/>
         </p:nvGrpSpPr>
@@ -7534,7 +9613,13 @@
         </p:grpSpPr>
         <p:sp>
           <p:nvSpPr>
-            <p:cNvPr id="10" name="Freeform 10"/>
+            <p:cNvPr id="10" name="Freeform 10">
+              <a:extLst>
+                <a:ext uri="{FF2B5EF4-FFF2-40B4-BE49-F238E27FC236}">
+                  <a16:creationId xmlns:a16="http://schemas.microsoft.com/office/drawing/2014/main" id="{5616449F-2011-5344-2E2F-9B119C2A870E}"/>
+                </a:ext>
+              </a:extLst>
+            </p:cNvPr>
             <p:cNvSpPr/>
             <p:nvPr/>
           </p:nvSpPr>
@@ -7635,7 +9720,13 @@
         </p:sp>
         <p:sp>
           <p:nvSpPr>
-            <p:cNvPr id="11" name="TextBox 11"/>
+            <p:cNvPr id="11" name="TextBox 11">
+              <a:extLst>
+                <a:ext uri="{FF2B5EF4-FFF2-40B4-BE49-F238E27FC236}">
+                  <a16:creationId xmlns:a16="http://schemas.microsoft.com/office/drawing/2014/main" id="{37B0A2BD-A5B3-EB4C-D152-9D87DC76DEA2}"/>
+                </a:ext>
+              </a:extLst>
+            </p:cNvPr>
             <p:cNvSpPr txBox="1"/>
             <p:nvPr/>
           </p:nvSpPr>
@@ -7664,7 +9755,13 @@
       </p:grpSp>
       <p:grpSp>
         <p:nvGrpSpPr>
-          <p:cNvPr id="12" name="Group 12"/>
+          <p:cNvPr id="12" name="Group 12">
+            <a:extLst>
+              <a:ext uri="{FF2B5EF4-FFF2-40B4-BE49-F238E27FC236}">
+                <a16:creationId xmlns:a16="http://schemas.microsoft.com/office/drawing/2014/main" id="{9E87D0BD-7AAD-E3D2-24D1-3220552A9B30}"/>
+              </a:ext>
+            </a:extLst>
+          </p:cNvPr>
           <p:cNvGrpSpPr/>
           <p:nvPr/>
         </p:nvGrpSpPr>
@@ -7678,7 +9775,13 @@
         </p:grpSpPr>
         <p:sp>
           <p:nvSpPr>
-            <p:cNvPr id="13" name="Freeform 13"/>
+            <p:cNvPr id="13" name="Freeform 13">
+              <a:extLst>
+                <a:ext uri="{FF2B5EF4-FFF2-40B4-BE49-F238E27FC236}">
+                  <a16:creationId xmlns:a16="http://schemas.microsoft.com/office/drawing/2014/main" id="{F430DF1A-A288-5CCB-A6B8-F94E16BB17DE}"/>
+                </a:ext>
+              </a:extLst>
+            </p:cNvPr>
             <p:cNvSpPr/>
             <p:nvPr/>
           </p:nvSpPr>
@@ -7712,7 +9815,7 @@
               </a:pathLst>
             </a:custGeom>
             <a:blipFill>
-              <a:blip r:embed="rId4"/>
+              <a:blip r:embed="rId3"/>
               <a:stretch>
                 <a:fillRect l="-821" r="-821"/>
               </a:stretch>
@@ -7736,7 +9839,13 @@
       </p:grpSp>
       <p:grpSp>
         <p:nvGrpSpPr>
-          <p:cNvPr id="14" name="Group 14"/>
+          <p:cNvPr id="14" name="Group 14">
+            <a:extLst>
+              <a:ext uri="{FF2B5EF4-FFF2-40B4-BE49-F238E27FC236}">
+                <a16:creationId xmlns:a16="http://schemas.microsoft.com/office/drawing/2014/main" id="{FBF78A8B-B290-75ED-6D07-6E7A83B8CD59}"/>
+              </a:ext>
+            </a:extLst>
+          </p:cNvPr>
           <p:cNvGrpSpPr/>
           <p:nvPr/>
         </p:nvGrpSpPr>
@@ -7750,7 +9859,13 @@
         </p:grpSpPr>
         <p:sp>
           <p:nvSpPr>
-            <p:cNvPr id="15" name="Freeform 15"/>
+            <p:cNvPr id="15" name="Freeform 15">
+              <a:extLst>
+                <a:ext uri="{FF2B5EF4-FFF2-40B4-BE49-F238E27FC236}">
+                  <a16:creationId xmlns:a16="http://schemas.microsoft.com/office/drawing/2014/main" id="{D7AB4131-A88B-E522-4201-DED459CF0396}"/>
+                </a:ext>
+              </a:extLst>
+            </p:cNvPr>
             <p:cNvSpPr/>
             <p:nvPr/>
           </p:nvSpPr>
@@ -7851,7 +9966,13 @@
         </p:sp>
         <p:sp>
           <p:nvSpPr>
-            <p:cNvPr id="16" name="TextBox 16"/>
+            <p:cNvPr id="16" name="TextBox 16">
+              <a:extLst>
+                <a:ext uri="{FF2B5EF4-FFF2-40B4-BE49-F238E27FC236}">
+                  <a16:creationId xmlns:a16="http://schemas.microsoft.com/office/drawing/2014/main" id="{AA96830F-A929-8B47-2700-2D87C604E4F7}"/>
+                </a:ext>
+              </a:extLst>
+            </p:cNvPr>
             <p:cNvSpPr txBox="1"/>
             <p:nvPr/>
           </p:nvSpPr>
@@ -7880,51 +10001,13 @@
       </p:grpSp>
       <p:sp>
         <p:nvSpPr>
-          <p:cNvPr id="17" name="TextBox 17"/>
-          <p:cNvSpPr txBox="1"/>
-          <p:nvPr/>
-        </p:nvSpPr>
-        <p:spPr>
-          <a:xfrm>
-            <a:off x="15475621" y="1069572"/>
-            <a:ext cx="1783679" cy="441370"/>
-          </a:xfrm>
-          <a:prstGeom prst="rect">
-            <a:avLst/>
-          </a:prstGeom>
-        </p:spPr>
-        <p:txBody>
-          <a:bodyPr lIns="0" tIns="0" rIns="0" bIns="0" rtlCol="0" anchor="t">
-            <a:spAutoFit/>
-          </a:bodyPr>
-          <a:lstStyle/>
-          <a:p>
-            <a:pPr marL="0" lvl="0" indent="0" algn="r">
-              <a:lnSpc>
-                <a:spcPts val="3497"/>
-              </a:lnSpc>
-              <a:spcBef>
-                <a:spcPct val="0"/>
-              </a:spcBef>
-            </a:pPr>
-            <a:r>
-              <a:rPr lang="en-US" sz="2498">
-                <a:solidFill>
-                  <a:srgbClr val="FFDE59"/>
-                </a:solidFill>
-                <a:latin typeface="Poppins"/>
-                <a:ea typeface="Poppins"/>
-                <a:cs typeface="Poppins"/>
-                <a:sym typeface="Poppins"/>
-              </a:rPr>
-              <a:t>AI Project</a:t>
-            </a:r>
-          </a:p>
-        </p:txBody>
-      </p:sp>
-      <p:sp>
-        <p:nvSpPr>
-          <p:cNvPr id="18" name="TextBox 18"/>
+          <p:cNvPr id="18" name="TextBox 18">
+            <a:extLst>
+              <a:ext uri="{FF2B5EF4-FFF2-40B4-BE49-F238E27FC236}">
+                <a16:creationId xmlns:a16="http://schemas.microsoft.com/office/drawing/2014/main" id="{50AEFD0E-C493-489E-3BE8-1D5F4252F3C2}"/>
+              </a:ext>
+            </a:extLst>
+          </p:cNvPr>
           <p:cNvSpPr txBox="1"/>
           <p:nvPr/>
         </p:nvSpPr>
@@ -7968,7 +10051,13 @@
       </p:sp>
       <p:sp>
         <p:nvSpPr>
-          <p:cNvPr id="19" name="TextBox 19"/>
+          <p:cNvPr id="19" name="TextBox 19">
+            <a:extLst>
+              <a:ext uri="{FF2B5EF4-FFF2-40B4-BE49-F238E27FC236}">
+                <a16:creationId xmlns:a16="http://schemas.microsoft.com/office/drawing/2014/main" id="{F187EF37-41F3-314F-6112-D7864C8E64A6}"/>
+              </a:ext>
+            </a:extLst>
+          </p:cNvPr>
           <p:cNvSpPr txBox="1"/>
           <p:nvPr/>
         </p:nvSpPr>
@@ -8012,7 +10101,13 @@
       </p:sp>
       <p:sp>
         <p:nvSpPr>
-          <p:cNvPr id="20" name="TextBox 20"/>
+          <p:cNvPr id="20" name="TextBox 20">
+            <a:extLst>
+              <a:ext uri="{FF2B5EF4-FFF2-40B4-BE49-F238E27FC236}">
+                <a16:creationId xmlns:a16="http://schemas.microsoft.com/office/drawing/2014/main" id="{CE0441D0-89D5-FAE9-B595-7AD99543C704}"/>
+              </a:ext>
+            </a:extLst>
+          </p:cNvPr>
           <p:cNvSpPr txBox="1"/>
           <p:nvPr/>
         </p:nvSpPr>
@@ -8056,7 +10151,13 @@
       </p:sp>
       <p:sp>
         <p:nvSpPr>
-          <p:cNvPr id="21" name="TextBox 21"/>
+          <p:cNvPr id="21" name="TextBox 21">
+            <a:extLst>
+              <a:ext uri="{FF2B5EF4-FFF2-40B4-BE49-F238E27FC236}">
+                <a16:creationId xmlns:a16="http://schemas.microsoft.com/office/drawing/2014/main" id="{5CB79976-6E11-8DEE-4321-85AB85539FD9}"/>
+              </a:ext>
+            </a:extLst>
+          </p:cNvPr>
           <p:cNvSpPr txBox="1"/>
           <p:nvPr/>
         </p:nvSpPr>
@@ -8100,7 +10201,13 @@
       </p:sp>
       <p:sp>
         <p:nvSpPr>
-          <p:cNvPr id="22" name="TextBox 22"/>
+          <p:cNvPr id="22" name="TextBox 22">
+            <a:extLst>
+              <a:ext uri="{FF2B5EF4-FFF2-40B4-BE49-F238E27FC236}">
+                <a16:creationId xmlns:a16="http://schemas.microsoft.com/office/drawing/2014/main" id="{3BF7DDC3-671B-BA6B-3877-7416B2EEB49D}"/>
+              </a:ext>
+            </a:extLst>
+          </p:cNvPr>
           <p:cNvSpPr txBox="1"/>
           <p:nvPr/>
         </p:nvSpPr>
@@ -8144,7 +10251,13 @@
       </p:sp>
       <p:sp>
         <p:nvSpPr>
-          <p:cNvPr id="23" name="TextBox 23"/>
+          <p:cNvPr id="23" name="TextBox 23">
+            <a:extLst>
+              <a:ext uri="{FF2B5EF4-FFF2-40B4-BE49-F238E27FC236}">
+                <a16:creationId xmlns:a16="http://schemas.microsoft.com/office/drawing/2014/main" id="{DF4C2D4F-9860-576D-8115-C048C05D3955}"/>
+              </a:ext>
+            </a:extLst>
+          </p:cNvPr>
           <p:cNvSpPr txBox="1"/>
           <p:nvPr/>
         </p:nvSpPr>
@@ -8188,7 +10301,13 @@
       </p:sp>
       <p:sp>
         <p:nvSpPr>
-          <p:cNvPr id="24" name="TextBox 24"/>
+          <p:cNvPr id="24" name="TextBox 24">
+            <a:extLst>
+              <a:ext uri="{FF2B5EF4-FFF2-40B4-BE49-F238E27FC236}">
+                <a16:creationId xmlns:a16="http://schemas.microsoft.com/office/drawing/2014/main" id="{EA5D4D56-4AAD-B560-9492-DCB374125E55}"/>
+              </a:ext>
+            </a:extLst>
+          </p:cNvPr>
           <p:cNvSpPr txBox="1"/>
           <p:nvPr/>
         </p:nvSpPr>
@@ -8288,6 +10407,11 @@
         </p:txBody>
       </p:sp>
     </p:spTree>
+    <p:extLst>
+      <p:ext uri="{BB962C8B-B14F-4D97-AF65-F5344CB8AC3E}">
+        <p14:creationId xmlns:p14="http://schemas.microsoft.com/office/powerpoint/2010/main" val="1053910524"/>
+      </p:ext>
+    </p:extLst>
   </p:cSld>
   <p:clrMapOvr>
     <a:masterClrMapping/>
@@ -8295,7 +10419,7 @@
 </p:sld>
 </file>
 
-<file path=ppt/slides/slide7.xml><?xml version="1.0" encoding="utf-8"?>
+<file path=ppt/slides/slide8.xml><?xml version="1.0" encoding="utf-8"?>
 <p:sld xmlns:a="http://schemas.openxmlformats.org/drawingml/2006/main" xmlns:r="http://schemas.openxmlformats.org/officeDocument/2006/relationships" xmlns:p="http://schemas.openxmlformats.org/presentationml/2006/main">
   <p:cSld>
     <p:bg>
@@ -8829,7 +10953,7 @@
 </p:sld>
 </file>
 
-<file path=ppt/slides/slide8.xml><?xml version="1.0" encoding="utf-8"?>
+<file path=ppt/slides/slide9.xml><?xml version="1.0" encoding="utf-8"?>
 <p:sld xmlns:a="http://schemas.openxmlformats.org/drawingml/2006/main" xmlns:r="http://schemas.openxmlformats.org/officeDocument/2006/relationships" xmlns:p="http://schemas.openxmlformats.org/presentationml/2006/main">
   <p:cSld>
     <p:spTree>
@@ -8938,10 +11062,10 @@
             </a:pathLst>
           </a:custGeom>
           <a:blipFill>
-            <a:blip r:embed="rId3">
+            <a:blip>
               <a:extLst>
                 <a:ext uri="{96DAC541-7B7A-43D3-8B79-37D633B846F1}">
-                  <asvg:svgBlip xmlns:asvg="http://schemas.microsoft.com/office/drawing/2016/SVG/main" r:embed="rId4"/>
+                  <asvg:svgBlip xmlns:asvg="http://schemas.microsoft.com/office/drawing/2016/SVG/main" r:embed="rId3"/>
                 </a:ext>
               </a:extLst>
             </a:blip>
